--- a/Lectures/4.Decompilation/Lecture4.pptx
+++ b/Lectures/4.Decompilation/Lecture4.pptx
@@ -252,7 +252,7 @@
             </a:pPr>
             <a:fld id="{8A70136C-4900-4139-A65E-0FFE21BA8660}" type="datetimeFigureOut">
               <a:rPr lang="en-US"/>
-              <a:t>11/14/2025</a:t>
+              <a:t>10/19/2026</a:t>
             </a:fld>
             <a:endParaRPr lang="en-US"/>
           </a:p>
@@ -2299,7 +2299,7 @@
             <a:pPr>
               <a:defRPr/>
             </a:pPr>
-            <a:endParaRPr/>
+            <a:endParaRPr dirty="0"/>
           </a:p>
         </p:txBody>
       </p:sp>
@@ -8901,10 +8901,10 @@
               <a:defRPr/>
             </a:pPr>
             <a:r>
-              <a:rPr lang="ru-RU" sz="2000"/>
+              <a:rPr lang="ru-RU" sz="2000" dirty="0"/>
               <a:t>Если количество итераций цикла неизвестно заранее, но известно в момент входа в цикл, то можно частично развернуть цикл, разделив его на 2 части.</a:t>
             </a:r>
-            <a:endParaRPr/>
+            <a:endParaRPr dirty="0"/>
           </a:p>
           <a:p>
             <a:pPr marL="0" indent="0">
@@ -8912,14 +8912,14 @@
               <a:defRPr/>
             </a:pPr>
             <a:r>
-              <a:rPr lang="ru-RU" sz="2000"/>
+              <a:rPr lang="ru-RU" sz="2000" dirty="0"/>
               <a:t>Первая часть обрабатывает «голову» цикла, если общее число итераций не кратно </a:t>
             </a:r>
             <a:r>
-              <a:rPr lang="en-US" sz="2000"/>
+              <a:rPr lang="en-US" sz="2000" dirty="0"/>
               <a:t>K. </a:t>
             </a:r>
-            <a:endParaRPr lang="ru-RU" sz="2000"/>
+            <a:endParaRPr lang="ru-RU" sz="2000" dirty="0"/>
           </a:p>
           <a:p>
             <a:pPr marL="0" indent="0">
@@ -8927,44 +8927,44 @@
               <a:defRPr/>
             </a:pPr>
             <a:r>
-              <a:rPr lang="ru-RU" sz="2000"/>
+              <a:rPr lang="ru-RU" sz="2000" dirty="0"/>
               <a:t>Вторая часть выполняет итерации группами по </a:t>
             </a:r>
             <a:r>
-              <a:rPr lang="en-US" sz="2000"/>
+              <a:rPr lang="en-US" sz="2000" dirty="0"/>
               <a:t>K (</a:t>
             </a:r>
             <a:r>
-              <a:rPr lang="ru-RU" sz="2000"/>
+              <a:rPr lang="ru-RU" sz="2000" dirty="0"/>
               <a:t>т.е. содержит тело цикла, повторенное </a:t>
             </a:r>
             <a:r>
-              <a:rPr lang="en-US" sz="2000"/>
+              <a:rPr lang="en-US" sz="2000" dirty="0"/>
               <a:t>K </a:t>
             </a:r>
             <a:r>
-              <a:rPr lang="ru-RU" sz="2000"/>
+              <a:rPr lang="ru-RU" sz="2000" dirty="0"/>
               <a:t>раз.</a:t>
             </a:r>
             <a:r>
-              <a:rPr lang="en-US" sz="2000"/>
+              <a:rPr lang="en-US" sz="2000" dirty="0"/>
               <a:t>)</a:t>
             </a:r>
-            <a:endParaRPr lang="ru-RU" sz="2000"/>
+            <a:endParaRPr lang="ru-RU" sz="2000" dirty="0"/>
           </a:p>
           <a:p>
             <a:pPr marL="0" indent="0">
               <a:buNone/>
               <a:defRPr/>
             </a:pPr>
-            <a:endParaRPr lang="en-US" sz="2000"/>
+            <a:endParaRPr lang="en-US" sz="2000" dirty="0"/>
           </a:p>
           <a:p>
             <a:pPr marL="0" indent="0">
               <a:buNone/>
               <a:defRPr/>
             </a:pPr>
-            <a:endParaRPr lang="ru-RU" sz="2000"/>
+            <a:endParaRPr lang="ru-RU" sz="2000" dirty="0"/>
           </a:p>
         </p:txBody>
       </p:sp>
@@ -8994,7 +8994,7 @@
               <a:defRPr/>
             </a:pPr>
             <a:r>
-              <a:rPr lang="pt-BR" b="0">
+              <a:rPr lang="pt-BR" b="0" dirty="0">
                 <a:solidFill>
                   <a:srgbClr val="0000FF"/>
                 </a:solidFill>
@@ -9003,7 +9003,7 @@
               <a:t>int</a:t>
             </a:r>
             <a:r>
-              <a:rPr lang="pt-BR" b="0">
+              <a:rPr lang="pt-BR" b="0" dirty="0">
                 <a:solidFill>
                   <a:srgbClr val="000000"/>
                 </a:solidFill>
@@ -9012,7 +9012,7 @@
               <a:t> pow(</a:t>
             </a:r>
             <a:r>
-              <a:rPr lang="pt-BR" b="0">
+              <a:rPr lang="pt-BR" b="0" dirty="0">
                 <a:solidFill>
                   <a:srgbClr val="0000FF"/>
                 </a:solidFill>
@@ -9021,7 +9021,7 @@
               <a:t>int</a:t>
             </a:r>
             <a:r>
-              <a:rPr lang="pt-BR" b="0">
+              <a:rPr lang="pt-BR" b="0" dirty="0">
                 <a:solidFill>
                   <a:srgbClr val="000000"/>
                 </a:solidFill>
@@ -9030,7 +9030,7 @@
               <a:t> x, </a:t>
             </a:r>
             <a:r>
-              <a:rPr lang="pt-BR" b="0">
+              <a:rPr lang="pt-BR" b="0" dirty="0">
                 <a:solidFill>
                   <a:srgbClr val="0000FF"/>
                 </a:solidFill>
@@ -9039,7 +9039,7 @@
               <a:t>int</a:t>
             </a:r>
             <a:r>
-              <a:rPr lang="pt-BR" b="0">
+              <a:rPr lang="pt-BR" b="0" dirty="0">
                 <a:solidFill>
                   <a:srgbClr val="000000"/>
                 </a:solidFill>
@@ -9047,14 +9047,14 @@
               </a:rPr>
               <a:t> c){</a:t>
             </a:r>
-            <a:endParaRPr/>
-          </a:p>
-          <a:p>
-            <a:pPr>
-              <a:defRPr/>
-            </a:pPr>
-            <a:r>
-              <a:rPr lang="pt-BR" b="0">
+            <a:endParaRPr dirty="0"/>
+          </a:p>
+          <a:p>
+            <a:pPr>
+              <a:defRPr/>
+            </a:pPr>
+            <a:r>
+              <a:rPr lang="pt-BR" b="0" dirty="0">
                 <a:solidFill>
                   <a:srgbClr val="000000"/>
                 </a:solidFill>
@@ -9063,7 +9063,7 @@
               <a:t>    </a:t>
             </a:r>
             <a:r>
-              <a:rPr lang="pt-BR" b="0">
+              <a:rPr lang="pt-BR" b="0" dirty="0">
                 <a:solidFill>
                   <a:srgbClr val="0000FF"/>
                 </a:solidFill>
@@ -9072,7 +9072,7 @@
               <a:t>int</a:t>
             </a:r>
             <a:r>
-              <a:rPr lang="pt-BR" b="0">
+              <a:rPr lang="pt-BR" b="0" dirty="0">
                 <a:solidFill>
                   <a:srgbClr val="000000"/>
                 </a:solidFill>
@@ -9081,7 +9081,7 @@
               <a:t> r = </a:t>
             </a:r>
             <a:r>
-              <a:rPr lang="pt-BR" b="0">
+              <a:rPr lang="pt-BR" b="0" dirty="0">
                 <a:solidFill>
                   <a:srgbClr val="098658"/>
                 </a:solidFill>
@@ -9090,7 +9090,7 @@
               <a:t>1</a:t>
             </a:r>
             <a:r>
-              <a:rPr lang="pt-BR" b="0">
+              <a:rPr lang="pt-BR" b="0" dirty="0">
                 <a:solidFill>
                   <a:srgbClr val="000000"/>
                 </a:solidFill>
@@ -9098,7 +9098,7 @@
               </a:rPr>
               <a:t>;</a:t>
             </a:r>
-            <a:endParaRPr lang="ru-RU">
+            <a:endParaRPr lang="ru-RU" dirty="0">
               <a:solidFill>
                 <a:srgbClr val="000000"/>
               </a:solidFill>
@@ -9110,7 +9110,7 @@
               <a:defRPr/>
             </a:pPr>
             <a:r>
-              <a:rPr lang="ru-RU">
+              <a:rPr lang="ru-RU" dirty="0">
                 <a:solidFill>
                   <a:srgbClr val="000000"/>
                 </a:solidFill>
@@ -9119,7 +9119,7 @@
               <a:t>    </a:t>
             </a:r>
             <a:r>
-              <a:rPr lang="pt-BR" b="0">
+              <a:rPr lang="pt-BR" b="0" dirty="0">
                 <a:solidFill>
                   <a:srgbClr val="0000FF"/>
                 </a:solidFill>
@@ -9128,7 +9128,7 @@
               <a:t>switch</a:t>
             </a:r>
             <a:r>
-              <a:rPr lang="pt-BR" b="0">
+              <a:rPr lang="pt-BR" b="0" dirty="0">
                 <a:solidFill>
                   <a:srgbClr val="000000"/>
                 </a:solidFill>
@@ -9137,7 +9137,7 @@
               <a:t>(c % </a:t>
             </a:r>
             <a:r>
-              <a:rPr lang="pt-BR" b="0">
+              <a:rPr lang="pt-BR" b="0" dirty="0">
                 <a:solidFill>
                   <a:srgbClr val="098658"/>
                 </a:solidFill>
@@ -9146,7 +9146,7 @@
               <a:t>5</a:t>
             </a:r>
             <a:r>
-              <a:rPr lang="pt-BR" b="0">
+              <a:rPr lang="pt-BR" b="0" dirty="0">
                 <a:solidFill>
                   <a:srgbClr val="000000"/>
                 </a:solidFill>
@@ -9154,14 +9154,14 @@
               </a:rPr>
               <a:t>){</a:t>
             </a:r>
-            <a:endParaRPr/>
-          </a:p>
-          <a:p>
-            <a:pPr>
-              <a:defRPr/>
-            </a:pPr>
-            <a:r>
-              <a:rPr lang="pt-BR" b="0">
+            <a:endParaRPr dirty="0"/>
+          </a:p>
+          <a:p>
+            <a:pPr>
+              <a:defRPr/>
+            </a:pPr>
+            <a:r>
+              <a:rPr lang="pt-BR" b="0" dirty="0">
                 <a:solidFill>
                   <a:srgbClr val="000000"/>
                 </a:solidFill>
@@ -9170,7 +9170,7 @@
               <a:t>        </a:t>
             </a:r>
             <a:r>
-              <a:rPr lang="pt-BR" b="0">
+              <a:rPr lang="pt-BR" b="0" dirty="0">
                 <a:solidFill>
                   <a:srgbClr val="0000FF"/>
                 </a:solidFill>
@@ -9179,7 +9179,7 @@
               <a:t>case</a:t>
             </a:r>
             <a:r>
-              <a:rPr lang="pt-BR" b="0">
+              <a:rPr lang="pt-BR" b="0" dirty="0">
                 <a:solidFill>
                   <a:srgbClr val="000000"/>
                 </a:solidFill>
@@ -9188,7 +9188,7 @@
               <a:t> </a:t>
             </a:r>
             <a:r>
-              <a:rPr lang="pt-BR" b="0">
+              <a:rPr lang="pt-BR" b="0" dirty="0">
                 <a:solidFill>
                   <a:srgbClr val="098658"/>
                 </a:solidFill>
@@ -9197,7 +9197,7 @@
               <a:t>4</a:t>
             </a:r>
             <a:r>
-              <a:rPr lang="pt-BR" b="0">
+              <a:rPr lang="pt-BR" b="0" dirty="0">
                 <a:solidFill>
                   <a:srgbClr val="000000"/>
                 </a:solidFill>
@@ -9205,14 +9205,14 @@
               </a:rPr>
               <a:t>: r*=x;</a:t>
             </a:r>
-            <a:endParaRPr/>
-          </a:p>
-          <a:p>
-            <a:pPr>
-              <a:defRPr/>
-            </a:pPr>
-            <a:r>
-              <a:rPr lang="pt-BR" b="0">
+            <a:endParaRPr dirty="0"/>
+          </a:p>
+          <a:p>
+            <a:pPr>
+              <a:defRPr/>
+            </a:pPr>
+            <a:r>
+              <a:rPr lang="pt-BR" b="0" dirty="0">
                 <a:solidFill>
                   <a:srgbClr val="000000"/>
                 </a:solidFill>
@@ -9221,7 +9221,7 @@
               <a:t>        </a:t>
             </a:r>
             <a:r>
-              <a:rPr lang="pt-BR" b="0">
+              <a:rPr lang="pt-BR" b="0" dirty="0">
                 <a:solidFill>
                   <a:srgbClr val="0000FF"/>
                 </a:solidFill>
@@ -9230,7 +9230,7 @@
               <a:t>case</a:t>
             </a:r>
             <a:r>
-              <a:rPr lang="pt-BR" b="0">
+              <a:rPr lang="pt-BR" b="0" dirty="0">
                 <a:solidFill>
                   <a:srgbClr val="000000"/>
                 </a:solidFill>
@@ -9239,7 +9239,7 @@
               <a:t> </a:t>
             </a:r>
             <a:r>
-              <a:rPr lang="pt-BR" b="0">
+              <a:rPr lang="pt-BR" b="0" dirty="0">
                 <a:solidFill>
                   <a:srgbClr val="098658"/>
                 </a:solidFill>
@@ -9248,7 +9248,7 @@
               <a:t>3</a:t>
             </a:r>
             <a:r>
-              <a:rPr lang="pt-BR" b="0">
+              <a:rPr lang="pt-BR" b="0" dirty="0">
                 <a:solidFill>
                   <a:srgbClr val="000000"/>
                 </a:solidFill>
@@ -9256,14 +9256,14 @@
               </a:rPr>
               <a:t>: r*=x;</a:t>
             </a:r>
-            <a:endParaRPr/>
-          </a:p>
-          <a:p>
-            <a:pPr>
-              <a:defRPr/>
-            </a:pPr>
-            <a:r>
-              <a:rPr lang="pt-BR" b="0">
+            <a:endParaRPr dirty="0"/>
+          </a:p>
+          <a:p>
+            <a:pPr>
+              <a:defRPr/>
+            </a:pPr>
+            <a:r>
+              <a:rPr lang="pt-BR" b="0" dirty="0">
                 <a:solidFill>
                   <a:srgbClr val="000000"/>
                 </a:solidFill>
@@ -9272,7 +9272,7 @@
               <a:t>        </a:t>
             </a:r>
             <a:r>
-              <a:rPr lang="pt-BR" b="0">
+              <a:rPr lang="pt-BR" b="0" dirty="0">
                 <a:solidFill>
                   <a:srgbClr val="0000FF"/>
                 </a:solidFill>
@@ -9281,7 +9281,7 @@
               <a:t>case</a:t>
             </a:r>
             <a:r>
-              <a:rPr lang="pt-BR" b="0">
+              <a:rPr lang="pt-BR" b="0" dirty="0">
                 <a:solidFill>
                   <a:srgbClr val="000000"/>
                 </a:solidFill>
@@ -9290,7 +9290,7 @@
               <a:t> </a:t>
             </a:r>
             <a:r>
-              <a:rPr lang="pt-BR" b="0">
+              <a:rPr lang="pt-BR" b="0" dirty="0">
                 <a:solidFill>
                   <a:srgbClr val="098658"/>
                 </a:solidFill>
@@ -9299,7 +9299,7 @@
               <a:t>2</a:t>
             </a:r>
             <a:r>
-              <a:rPr lang="pt-BR" b="0">
+              <a:rPr lang="pt-BR" b="0" dirty="0">
                 <a:solidFill>
                   <a:srgbClr val="000000"/>
                 </a:solidFill>
@@ -9307,14 +9307,14 @@
               </a:rPr>
               <a:t>: r*=x;</a:t>
             </a:r>
-            <a:endParaRPr/>
-          </a:p>
-          <a:p>
-            <a:pPr>
-              <a:defRPr/>
-            </a:pPr>
-            <a:r>
-              <a:rPr lang="pt-BR" b="0">
+            <a:endParaRPr dirty="0"/>
+          </a:p>
+          <a:p>
+            <a:pPr>
+              <a:defRPr/>
+            </a:pPr>
+            <a:r>
+              <a:rPr lang="pt-BR" b="0" dirty="0">
                 <a:solidFill>
                   <a:srgbClr val="000000"/>
                 </a:solidFill>
@@ -9323,7 +9323,7 @@
               <a:t>        </a:t>
             </a:r>
             <a:r>
-              <a:rPr lang="pt-BR" b="0">
+              <a:rPr lang="pt-BR" b="0" dirty="0">
                 <a:solidFill>
                   <a:srgbClr val="0000FF"/>
                 </a:solidFill>
@@ -9332,7 +9332,7 @@
               <a:t>case</a:t>
             </a:r>
             <a:r>
-              <a:rPr lang="pt-BR" b="0">
+              <a:rPr lang="pt-BR" b="0" dirty="0">
                 <a:solidFill>
                   <a:srgbClr val="000000"/>
                 </a:solidFill>
@@ -9341,7 +9341,7 @@
               <a:t> </a:t>
             </a:r>
             <a:r>
-              <a:rPr lang="pt-BR" b="0">
+              <a:rPr lang="pt-BR" b="0" dirty="0">
                 <a:solidFill>
                   <a:srgbClr val="098658"/>
                 </a:solidFill>
@@ -9350,7 +9350,7 @@
               <a:t>1</a:t>
             </a:r>
             <a:r>
-              <a:rPr lang="pt-BR" b="0">
+              <a:rPr lang="pt-BR" b="0" dirty="0">
                 <a:solidFill>
                   <a:srgbClr val="000000"/>
                 </a:solidFill>
@@ -9358,14 +9358,14 @@
               </a:rPr>
               <a:t>: r*=x;</a:t>
             </a:r>
-            <a:endParaRPr/>
-          </a:p>
-          <a:p>
-            <a:pPr>
-              <a:defRPr/>
-            </a:pPr>
-            <a:r>
-              <a:rPr lang="pt-BR" b="0">
+            <a:endParaRPr dirty="0"/>
+          </a:p>
+          <a:p>
+            <a:pPr>
+              <a:defRPr/>
+            </a:pPr>
+            <a:r>
+              <a:rPr lang="pt-BR" b="0" dirty="0">
                 <a:solidFill>
                   <a:srgbClr val="000000"/>
                 </a:solidFill>
@@ -9373,14 +9373,14 @@
               </a:rPr>
               <a:t>    }</a:t>
             </a:r>
-            <a:endParaRPr/>
-          </a:p>
-          <a:p>
-            <a:pPr>
-              <a:defRPr/>
-            </a:pPr>
-            <a:r>
-              <a:rPr lang="pt-BR" b="0">
+            <a:endParaRPr dirty="0"/>
+          </a:p>
+          <a:p>
+            <a:pPr>
+              <a:defRPr/>
+            </a:pPr>
+            <a:r>
+              <a:rPr lang="pt-BR" b="0" dirty="0">
                 <a:solidFill>
                   <a:srgbClr val="000000"/>
                 </a:solidFill>
@@ -9389,7 +9389,7 @@
               <a:t>    </a:t>
             </a:r>
             <a:r>
-              <a:rPr lang="pt-BR" b="0">
+              <a:rPr lang="pt-BR" b="0" dirty="0">
                 <a:solidFill>
                   <a:srgbClr val="0000FF"/>
                 </a:solidFill>
@@ -9398,7 +9398,7 @@
               <a:t>for</a:t>
             </a:r>
             <a:r>
-              <a:rPr lang="pt-BR" b="0">
+              <a:rPr lang="pt-BR" b="0" dirty="0">
                 <a:solidFill>
                   <a:srgbClr val="000000"/>
                 </a:solidFill>
@@ -9407,7 +9407,7 @@
               <a:t>(; c &gt; </a:t>
             </a:r>
             <a:r>
-              <a:rPr lang="pt-BR" b="0">
+              <a:rPr lang="pt-BR" b="0" dirty="0">
                 <a:solidFill>
                   <a:srgbClr val="098658"/>
                 </a:solidFill>
@@ -9416,7 +9416,7 @@
               <a:t>4</a:t>
             </a:r>
             <a:r>
-              <a:rPr lang="pt-BR" b="0">
+              <a:rPr lang="pt-BR" b="0" dirty="0">
                 <a:solidFill>
                   <a:srgbClr val="000000"/>
                 </a:solidFill>
@@ -9425,7 +9425,7 @@
               <a:t>; c-=</a:t>
             </a:r>
             <a:r>
-              <a:rPr lang="pt-BR" b="0">
+              <a:rPr lang="pt-BR" b="0" dirty="0">
                 <a:solidFill>
                   <a:srgbClr val="098658"/>
                 </a:solidFill>
@@ -9434,7 +9434,7 @@
               <a:t>5</a:t>
             </a:r>
             <a:r>
-              <a:rPr lang="pt-BR" b="0">
+              <a:rPr lang="pt-BR" b="0" dirty="0">
                 <a:solidFill>
                   <a:srgbClr val="000000"/>
                 </a:solidFill>
@@ -9442,14 +9442,14 @@
               </a:rPr>
               <a:t>)</a:t>
             </a:r>
-            <a:endParaRPr/>
-          </a:p>
-          <a:p>
-            <a:pPr>
-              <a:defRPr/>
-            </a:pPr>
-            <a:r>
-              <a:rPr lang="pt-BR" b="0">
+            <a:endParaRPr dirty="0"/>
+          </a:p>
+          <a:p>
+            <a:pPr>
+              <a:defRPr/>
+            </a:pPr>
+            <a:r>
+              <a:rPr lang="pt-BR" b="0" dirty="0">
                 <a:solidFill>
                   <a:srgbClr val="000000"/>
                 </a:solidFill>
@@ -9457,14 +9457,14 @@
               </a:rPr>
               <a:t>        {r*=x;r*=x;r*=x;r*=x;r*=x;}</a:t>
             </a:r>
-            <a:endParaRPr/>
+            <a:endParaRPr dirty="0"/>
           </a:p>
           <a:p>
             <a:pPr>
               <a:defRPr/>
             </a:pPr>
             <a:br>
-              <a:rPr lang="pt-BR" b="0">
+              <a:rPr lang="pt-BR" b="0" dirty="0">
                 <a:solidFill>
                   <a:srgbClr val="000000"/>
                 </a:solidFill>
@@ -9472,7 +9472,7 @@
               </a:rPr>
             </a:br>
             <a:r>
-              <a:rPr lang="pt-BR" b="0">
+              <a:rPr lang="pt-BR" b="0" dirty="0">
                 <a:solidFill>
                   <a:srgbClr val="000000"/>
                 </a:solidFill>
@@ -9481,7 +9481,7 @@
               <a:t>    </a:t>
             </a:r>
             <a:r>
-              <a:rPr lang="pt-BR" b="0">
+              <a:rPr lang="pt-BR" b="0" dirty="0">
                 <a:solidFill>
                   <a:srgbClr val="0000FF"/>
                 </a:solidFill>
@@ -9490,7 +9490,7 @@
               <a:t>return</a:t>
             </a:r>
             <a:r>
-              <a:rPr lang="pt-BR" b="0">
+              <a:rPr lang="pt-BR" b="0" dirty="0">
                 <a:solidFill>
                   <a:srgbClr val="000000"/>
                 </a:solidFill>
@@ -9498,14 +9498,14 @@
               </a:rPr>
               <a:t> r;</a:t>
             </a:r>
-            <a:endParaRPr/>
-          </a:p>
-          <a:p>
-            <a:pPr>
-              <a:defRPr/>
-            </a:pPr>
-            <a:r>
-              <a:rPr lang="pt-BR" b="0">
+            <a:endParaRPr dirty="0"/>
+          </a:p>
+          <a:p>
+            <a:pPr>
+              <a:defRPr/>
+            </a:pPr>
+            <a:r>
+              <a:rPr lang="pt-BR" b="0" dirty="0">
                 <a:solidFill>
                   <a:srgbClr val="000000"/>
                 </a:solidFill>
@@ -9513,7 +9513,7 @@
               </a:rPr>
               <a:t>}</a:t>
             </a:r>
-            <a:endParaRPr/>
+            <a:endParaRPr dirty="0"/>
           </a:p>
         </p:txBody>
       </p:sp>
@@ -10793,18 +10793,18 @@
               <a:defRPr/>
             </a:pPr>
             <a:r>
-              <a:rPr lang="ru-RU" sz="2000"/>
+              <a:rPr lang="ru-RU" sz="2000" dirty="0"/>
               <a:t>Каждая инструкция выполняется целое число тактов, при этом это число отличается для разных инструкций. Как следствие, имеет смысл заменять «дорогие» инструкции на «дешевые» (</a:t>
             </a:r>
             <a:r>
-              <a:rPr lang="en-US" sz="2000"/>
+              <a:rPr lang="en-US" sz="2000" dirty="0"/>
               <a:t>strength reduction</a:t>
             </a:r>
             <a:r>
-              <a:rPr lang="ru-RU" sz="2000"/>
+              <a:rPr lang="ru-RU" sz="2000" dirty="0"/>
               <a:t>).</a:t>
             </a:r>
-            <a:endParaRPr/>
+            <a:endParaRPr dirty="0"/>
           </a:p>
           <a:p>
             <a:pPr marL="0" indent="0">
@@ -10812,81 +10812,81 @@
               <a:defRPr/>
             </a:pPr>
             <a:r>
-              <a:rPr lang="ru-RU" sz="2000"/>
+              <a:rPr lang="ru-RU" sz="2000" dirty="0"/>
               <a:t>Типовыми примерами являются:</a:t>
             </a:r>
-            <a:endParaRPr/>
-          </a:p>
-          <a:p>
-            <a:pPr>
-              <a:defRPr/>
-            </a:pPr>
-            <a:r>
-              <a:rPr lang="ru-RU" sz="2000"/>
+            <a:endParaRPr dirty="0"/>
+          </a:p>
+          <a:p>
+            <a:pPr>
+              <a:defRPr/>
+            </a:pPr>
+            <a:r>
+              <a:rPr lang="ru-RU" sz="2000" dirty="0"/>
               <a:t>замена умножения/деления на степень 2 на сдвиги;</a:t>
             </a:r>
-            <a:endParaRPr lang="en-US" sz="2000"/>
-          </a:p>
-          <a:p>
-            <a:pPr>
-              <a:defRPr/>
-            </a:pPr>
-            <a:r>
-              <a:rPr lang="ru-RU" sz="2000"/>
+            <a:endParaRPr lang="en-US" sz="2000" dirty="0"/>
+          </a:p>
+          <a:p>
+            <a:pPr>
+              <a:defRPr/>
+            </a:pPr>
+            <a:r>
+              <a:rPr lang="ru-RU" sz="2000" dirty="0"/>
               <a:t>замена умножений на сдвиги и сложения (в т.ч. с помощью </a:t>
             </a:r>
             <a:r>
-              <a:rPr lang="en-US" sz="2000">
+              <a:rPr lang="en-US" sz="2000" dirty="0">
                 <a:latin typeface="Courier New"/>
                 <a:cs typeface="Courier New"/>
               </a:rPr>
               <a:t>LEA</a:t>
             </a:r>
             <a:r>
-              <a:rPr lang="ru-RU" sz="2000"/>
+              <a:rPr lang="ru-RU" sz="2000" dirty="0"/>
               <a:t>);</a:t>
             </a:r>
-            <a:endParaRPr/>
-          </a:p>
-          <a:p>
-            <a:pPr>
-              <a:defRPr/>
-            </a:pPr>
-            <a:r>
-              <a:rPr lang="ru-RU" sz="2000" u="sng">
+            <a:endParaRPr dirty="0"/>
+          </a:p>
+          <a:p>
+            <a:pPr>
+              <a:defRPr/>
+            </a:pPr>
+            <a:r>
+              <a:rPr lang="ru-RU" sz="2000" u="sng" dirty="0">
                 <a:hlinkClick r:id="rId3"/>
               </a:rPr>
               <a:t>замена вещественных операций целочисленными</a:t>
             </a:r>
             <a:r>
-              <a:rPr lang="ru-RU" sz="2000"/>
+              <a:rPr lang="ru-RU" sz="2000" dirty="0"/>
               <a:t>;</a:t>
             </a:r>
-            <a:endParaRPr/>
-          </a:p>
-          <a:p>
-            <a:pPr>
-              <a:defRPr/>
-            </a:pPr>
-            <a:r>
-              <a:rPr lang="ru-RU" sz="2000" u="sng">
+            <a:endParaRPr dirty="0"/>
+          </a:p>
+          <a:p>
+            <a:pPr>
+              <a:defRPr/>
+            </a:pPr>
+            <a:r>
+              <a:rPr lang="ru-RU" sz="2000" u="sng" dirty="0">
                 <a:hlinkClick r:id="rId4"/>
               </a:rPr>
               <a:t>замена целочисленного деления </a:t>
             </a:r>
             <a:r>
-              <a:rPr lang="ru-RU" sz="2000"/>
+              <a:rPr lang="ru-RU" sz="2000" dirty="0"/>
               <a:t>(</a:t>
             </a:r>
             <a:r>
-              <a:rPr lang="ru-RU" sz="2000" i="1"/>
+              <a:rPr lang="ru-RU" sz="2000" i="1" dirty="0"/>
               <a:t>самая дорогая целочисленная операция!</a:t>
             </a:r>
             <a:r>
-              <a:rPr lang="ru-RU" sz="2000"/>
+              <a:rPr lang="ru-RU" sz="2000" dirty="0"/>
               <a:t>).</a:t>
             </a:r>
-            <a:endParaRPr/>
+            <a:endParaRPr dirty="0"/>
           </a:p>
           <a:p>
             <a:pPr marL="0" indent="0">
@@ -10894,30 +10894,34 @@
               <a:defRPr/>
             </a:pPr>
             <a:r>
-              <a:rPr lang="ru-RU" sz="2000"/>
+              <a:rPr lang="ru-RU" sz="2000" dirty="0"/>
               <a:t>Дороговизна/дешевизна инструкций определяется точнее, если указать целевую микроархитектуру при компиляции (флаги </a:t>
             </a:r>
             <a:r>
-              <a:rPr lang="en-US" sz="2000"/>
+              <a:rPr lang="en-US" sz="2000" dirty="0"/>
               <a:t>-march</a:t>
             </a:r>
             <a:r>
-              <a:rPr lang="ru-RU" sz="2000"/>
+              <a:rPr lang="ru-RU" sz="2000" dirty="0"/>
               <a:t>/-</a:t>
             </a:r>
             <a:r>
-              <a:rPr lang="en-US" sz="2000"/>
-              <a:t>mtune </a:t>
-            </a:r>
-            <a:r>
-              <a:rPr lang="ru-RU" sz="2000"/>
+              <a:rPr lang="en-US" sz="2000" dirty="0" err="1"/>
+              <a:t>mtune</a:t>
+            </a:r>
+            <a:r>
+              <a:rPr lang="en-US" sz="2000" dirty="0"/>
+              <a:t> </a:t>
+            </a:r>
+            <a:r>
+              <a:rPr lang="ru-RU" sz="2000" dirty="0"/>
               <a:t>на </a:t>
             </a:r>
             <a:r>
-              <a:rPr lang="en-US" sz="2000"/>
+              <a:rPr lang="en-US" sz="2000" dirty="0"/>
               <a:t>GCC/clang).</a:t>
             </a:r>
-            <a:endParaRPr lang="ru-RU" sz="2000"/>
+            <a:endParaRPr lang="ru-RU" sz="2000" dirty="0"/>
           </a:p>
           <a:p>
             <a:pPr marL="0" indent="0">
@@ -10925,16 +10929,16 @@
               <a:defRPr/>
             </a:pPr>
             <a:r>
-              <a:rPr lang="ru-RU" sz="2000"/>
+              <a:rPr lang="ru-RU" sz="2000" dirty="0"/>
               <a:t>См. также: </a:t>
             </a:r>
             <a:r>
-              <a:rPr lang="ru-RU" sz="2000" u="sng">
+              <a:rPr lang="ru-RU" sz="2000" u="sng" dirty="0">
                 <a:hlinkClick r:id="rId5"/>
               </a:rPr>
               <a:t>таблицы времени выполнения инструкций (англ.)</a:t>
             </a:r>
-            <a:endParaRPr lang="ru-RU" sz="2000"/>
+            <a:endParaRPr lang="ru-RU" sz="2000" dirty="0"/>
           </a:p>
         </p:txBody>
       </p:sp>
@@ -11042,22 +11046,30 @@
               <a:defRPr/>
             </a:pPr>
             <a:r>
-              <a:rPr lang="ru-RU" sz="2000" b="1"/>
+              <a:rPr lang="ru-RU" sz="2000" b="1" dirty="0"/>
               <a:t>Неопределенное поведение (</a:t>
             </a:r>
             <a:r>
-              <a:rPr lang="en-US" sz="2000" b="1"/>
-              <a:t>Undefined behaviour, UB</a:t>
-            </a:r>
-            <a:r>
-              <a:rPr lang="ru-RU" sz="2000" b="1"/>
+              <a:rPr lang="en-US" sz="2000" b="1" dirty="0"/>
+              <a:t>Undefined </a:t>
+            </a:r>
+            <a:r>
+              <a:rPr lang="en-US" sz="2000" b="1" dirty="0" err="1"/>
+              <a:t>behaviour</a:t>
+            </a:r>
+            <a:r>
+              <a:rPr lang="en-US" sz="2000" b="1" dirty="0"/>
+              <a:t>, UB</a:t>
+            </a:r>
+            <a:r>
+              <a:rPr lang="ru-RU" sz="2000" b="1" dirty="0"/>
               <a:t>) </a:t>
             </a:r>
             <a:r>
-              <a:rPr lang="ru-RU" sz="2000"/>
+              <a:rPr lang="ru-RU" sz="2000" dirty="0"/>
               <a:t>– поведение программы, которое возникает при нарушении требований стандарта С++ и ведет к непредсказуемому результату работы программы.</a:t>
             </a:r>
-            <a:endParaRPr/>
+            <a:endParaRPr dirty="0"/>
           </a:p>
           <a:p>
             <a:pPr marL="0" indent="0">
@@ -11065,50 +11077,57 @@
               <a:defRPr/>
             </a:pPr>
             <a:r>
-              <a:rPr lang="ru-RU" sz="2000"/>
+              <a:rPr lang="ru-RU" sz="2000" dirty="0"/>
               <a:t>Обычно проблемы «неопределенного поведения» возникают при сборке с оптимизациями, т.к. компилятор имеет право считать, что </a:t>
             </a:r>
             <a:r>
-              <a:rPr lang="ru-RU" sz="2000" i="1"/>
+              <a:rPr lang="ru-RU" sz="2000" i="1" dirty="0"/>
               <a:t>ситуации неопределенного поведения не происходят</a:t>
             </a:r>
             <a:r>
-              <a:rPr lang="ru-RU" sz="2000"/>
-              <a:t>. Как следствие, компилятор может, в результате оптимизаций, изменить или убрать важную с точки зрения логики работы часть кода, приводящую к неопределенному поведению (</a:t>
-            </a:r>
-            <a:r>
-              <a:rPr lang="en-US" sz="2000"/>
+              <a:rPr lang="ru-RU" sz="2000" dirty="0"/>
+              <a:t>. Как следствие, компилятор может, в результате оптимизаций, изменить или убрать важную с точки зрения логики работы часть кода, приводящую к неопределенному поведению </a:t>
+            </a:r>
+            <a:br>
+              <a:rPr lang="en-US" sz="2000" dirty="0"/>
+            </a:br>
+            <a:r>
+              <a:rPr lang="ru-RU" sz="2000" dirty="0"/>
+              <a:t>(</a:t>
+            </a:r>
+            <a:r>
+              <a:rPr lang="en-US" sz="2000" dirty="0"/>
               <a:t>UB </a:t>
             </a:r>
             <a:r>
-              <a:rPr lang="ru-RU" sz="2000"/>
+              <a:rPr lang="ru-RU" sz="2000" dirty="0"/>
               <a:t>не происходит </a:t>
             </a:r>
             <a:r>
-              <a:rPr lang="en-US" sz="2000"/>
+              <a:rPr lang="en-US" sz="2000" dirty="0"/>
               <a:t>-&gt; </a:t>
             </a:r>
             <a:r>
-              <a:rPr lang="ru-RU" sz="2000"/>
+              <a:rPr lang="ru-RU" sz="2000" dirty="0"/>
               <a:t>код приводящий к </a:t>
             </a:r>
             <a:r>
-              <a:rPr lang="en-US" sz="2000"/>
+              <a:rPr lang="en-US" sz="2000" dirty="0"/>
               <a:t>UB </a:t>
             </a:r>
             <a:r>
-              <a:rPr lang="ru-RU" sz="2000"/>
+              <a:rPr lang="ru-RU" sz="2000" dirty="0"/>
               <a:t>никогда не выполняется </a:t>
             </a:r>
             <a:r>
-              <a:rPr lang="en-US" sz="2000"/>
+              <a:rPr lang="en-US" sz="2000" dirty="0"/>
               <a:t>–&gt; </a:t>
             </a:r>
             <a:r>
-              <a:rPr lang="ru-RU" sz="2000"/>
+              <a:rPr lang="ru-RU" sz="2000" dirty="0"/>
               <a:t>код можно убрать).</a:t>
             </a:r>
-            <a:endParaRPr/>
+            <a:endParaRPr dirty="0"/>
           </a:p>
           <a:p>
             <a:pPr marL="0" indent="0">
@@ -11116,10 +11135,10 @@
               <a:defRPr/>
             </a:pPr>
             <a:r>
-              <a:rPr lang="ru-RU" sz="2000"/>
+              <a:rPr lang="ru-RU" sz="2000" dirty="0"/>
               <a:t>К ситуациям неопределенного поведения стандарт С/С++  относит чаще всего или явные ошибки программиста, или ситуации, которые на разных архитектурах обрабатываются по-разному, и потому не могут быть сведены к 1 стандарту.</a:t>
             </a:r>
-            <a:endParaRPr/>
+            <a:endParaRPr dirty="0"/>
           </a:p>
           <a:p>
             <a:pPr marL="0" indent="0">
@@ -11127,15 +11146,15 @@
               <a:defRPr/>
             </a:pPr>
             <a:r>
-              <a:rPr lang="ru-RU" sz="2000"/>
+              <a:rPr lang="ru-RU" sz="2000" dirty="0"/>
               <a:t>Современные компиляторы детектируют большую часть источников неопределенного поведения =</a:t>
             </a:r>
             <a:r>
-              <a:rPr lang="en-US" sz="2000"/>
+              <a:rPr lang="en-US" sz="2000" dirty="0"/>
               <a:t>&gt; </a:t>
             </a:r>
             <a:r>
-              <a:rPr lang="ru-RU" sz="2000" b="1" u="sng">
+              <a:rPr lang="ru-RU" sz="2000" b="1" u="sng" dirty="0">
                 <a:solidFill>
                   <a:srgbClr val="FF0000"/>
                 </a:solidFill>
@@ -11143,17 +11162,17 @@
               <a:t>предупреждения компилятора надо читать и принимать во внимание</a:t>
             </a:r>
             <a:r>
-              <a:rPr lang="ru-RU" sz="2000"/>
+              <a:rPr lang="ru-RU" sz="2000" dirty="0"/>
               <a:t>.</a:t>
             </a:r>
-            <a:endParaRPr/>
+            <a:endParaRPr dirty="0"/>
           </a:p>
           <a:p>
             <a:pPr marL="0" indent="0">
               <a:buNone/>
               <a:defRPr/>
             </a:pPr>
-            <a:endParaRPr lang="ru-RU" sz="2000"/>
+            <a:endParaRPr lang="ru-RU" sz="2000" dirty="0"/>
           </a:p>
           <a:p>
             <a:pPr marL="0" indent="0">
@@ -11161,17 +11180,17 @@
               <a:defRPr/>
             </a:pPr>
             <a:r>
-              <a:rPr lang="ru-RU" sz="2000"/>
+              <a:rPr lang="ru-RU" sz="2000" dirty="0"/>
               <a:t>В языке ассемблера нет неопределенного поведения – поведение программы жестко задано поведением инструкций.</a:t>
             </a:r>
-            <a:endParaRPr/>
+            <a:endParaRPr dirty="0"/>
           </a:p>
           <a:p>
             <a:pPr marL="0" indent="0">
               <a:buNone/>
               <a:defRPr/>
             </a:pPr>
-            <a:endParaRPr lang="ru-RU" sz="2000"/>
+            <a:endParaRPr lang="ru-RU" sz="2000" dirty="0"/>
           </a:p>
         </p:txBody>
       </p:sp>
@@ -11210,7 +11229,7 @@
         <p:spPr bwMode="auto">
           <a:xfrm>
             <a:off x="838198" y="5183891"/>
-            <a:ext cx="8099544" cy="254382"/>
+            <a:ext cx="8326428" cy="254382"/>
           </a:xfrm>
           <a:prstGeom prst="rect">
             <a:avLst/>
@@ -11314,130 +11333,130 @@
               <a:defRPr/>
             </a:pPr>
             <a:r>
-              <a:rPr lang="ru-RU" sz="2000" u="sng">
+              <a:rPr lang="ru-RU" sz="2000" u="sng" dirty="0">
                 <a:hlinkClick r:id="rId3" tooltip="результат знакового переполнения определен на разных архитектурах по-разному, поэтом его проще запретить"/>
               </a:rPr>
               <a:t>знаковое переполнение</a:t>
             </a:r>
             <a:r>
-              <a:rPr lang="ru-RU" sz="2000"/>
+              <a:rPr lang="ru-RU" sz="2000" dirty="0"/>
               <a:t>; </a:t>
             </a:r>
-            <a:endParaRPr/>
-          </a:p>
-          <a:p>
-            <a:pPr>
-              <a:defRPr/>
-            </a:pPr>
-            <a:r>
-              <a:rPr lang="ru-RU" sz="2000" u="sng">
+            <a:endParaRPr dirty="0"/>
+          </a:p>
+          <a:p>
+            <a:pPr>
+              <a:defRPr/>
+            </a:pPr>
+            <a:r>
+              <a:rPr lang="ru-RU" sz="2000" u="sng" dirty="0">
                 <a:hlinkClick r:id="rId4" tooltip="пустой вечный цикл практически никогда не является желаемым поведением, поэтому компилятор оптимизирует код под случай, когда цикл вечным не является"/>
               </a:rPr>
-              <a:t>вечный цикл без </a:t>
-            </a:r>
-            <a:r>
-              <a:rPr lang="ru-RU" sz="2000" i="1" u="sng">
+              <a:t>вечный цикл без наблюдаемых извне действий (без </a:t>
+            </a:r>
+            <a:r>
+              <a:rPr lang="ru-RU" sz="2000" u="sng" dirty="0" err="1">
                 <a:hlinkClick r:id="rId4" tooltip="пустой вечный цикл практически никогда не является желаемым поведением, поэтому компилятор оптимизирует код под случай, когда цикл вечным не является"/>
               </a:rPr>
-              <a:t>наблюдаемых</a:t>
-            </a:r>
-            <a:r>
-              <a:rPr lang="en-US" sz="2000" i="1" u="sng">
+              <a:t>side</a:t>
+            </a:r>
+            <a:r>
+              <a:rPr lang="ru-RU" sz="2000" u="sng" dirty="0">
                 <a:hlinkClick r:id="rId4" tooltip="пустой вечный цикл практически никогда не является желаемым поведением, поэтому компилятор оптимизирует код под случай, когда цикл вечным не является"/>
               </a:rPr>
               <a:t> </a:t>
             </a:r>
             <a:r>
-              <a:rPr lang="ru-RU" sz="2000" i="1" u="sng">
+              <a:rPr lang="ru-RU" sz="2000" u="sng" dirty="0" err="1">
                 <a:hlinkClick r:id="rId4" tooltip="пустой вечный цикл практически никогда не является желаемым поведением, поэтому компилятор оптимизирует код под случай, когда цикл вечным не является"/>
               </a:rPr>
-              <a:t>извне</a:t>
-            </a:r>
-            <a:r>
-              <a:rPr lang="ru-RU" sz="2000" u="sng">
+              <a:t>effects</a:t>
+            </a:r>
+            <a:r>
+              <a:rPr lang="ru-RU" sz="2000" u="sng" dirty="0">
                 <a:hlinkClick r:id="rId4" tooltip="пустой вечный цикл практически никогда не является желаемым поведением, поэтому компилятор оптимизирует код под случай, когда цикл вечным не является"/>
               </a:rPr>
-              <a:t> действий</a:t>
-            </a:r>
-            <a:r>
-              <a:rPr lang="ru-RU" sz="2000"/>
+              <a:t>)</a:t>
+            </a:r>
+            <a:r>
+              <a:rPr lang="ru-RU" sz="2000" dirty="0"/>
               <a:t>; </a:t>
             </a:r>
-            <a:endParaRPr/>
-          </a:p>
-          <a:p>
-            <a:pPr>
-              <a:defRPr/>
-            </a:pPr>
-            <a:r>
-              <a:rPr lang="ru-RU" sz="2000" u="sng">
+            <a:endParaRPr dirty="0"/>
+          </a:p>
+          <a:p>
+            <a:pPr>
+              <a:defRPr/>
+            </a:pPr>
+            <a:r>
+              <a:rPr lang="ru-RU" sz="2000" u="sng" dirty="0">
                 <a:hlinkClick r:id="rId5" tooltip="значение неинициализированной переменной может быть любым - значит и результат работы может быть любой"/>
               </a:rPr>
               <a:t>использование неинициализированных переменных</a:t>
             </a:r>
             <a:r>
-              <a:rPr lang="ru-RU" sz="2000"/>
+              <a:rPr lang="ru-RU" sz="2000" dirty="0"/>
               <a:t>;</a:t>
             </a:r>
-            <a:endParaRPr/>
-          </a:p>
-          <a:p>
-            <a:pPr>
-              <a:defRPr/>
-            </a:pPr>
-            <a:r>
-              <a:rPr lang="ru-RU" sz="2000" u="sng">
+            <a:endParaRPr dirty="0"/>
+          </a:p>
+          <a:p>
+            <a:pPr>
+              <a:defRPr/>
+            </a:pPr>
+            <a:r>
+              <a:rPr lang="ru-RU" sz="2000" u="sng" dirty="0">
                 <a:hlinkClick r:id="rId6" tooltip="почти всегда (исключая случаи программирования ОС и микроконтроллеров) ошибка программиста"/>
               </a:rPr>
               <a:t>разыменование нулевого указателя</a:t>
             </a:r>
             <a:r>
-              <a:rPr lang="ru-RU" sz="2000"/>
+              <a:rPr lang="ru-RU" sz="2000" dirty="0"/>
               <a:t>;</a:t>
             </a:r>
-            <a:endParaRPr/>
-          </a:p>
-          <a:p>
-            <a:pPr>
-              <a:defRPr/>
-            </a:pPr>
-            <a:r>
-              <a:rPr lang="ru-RU" sz="2000"/>
+            <a:endParaRPr dirty="0"/>
+          </a:p>
+          <a:p>
+            <a:pPr>
+              <a:defRPr/>
+            </a:pPr>
+            <a:r>
+              <a:rPr lang="ru-RU" sz="2000" dirty="0"/>
               <a:t>доступ к элементу за границами массива;</a:t>
             </a:r>
-            <a:endParaRPr/>
-          </a:p>
-          <a:p>
-            <a:pPr>
-              <a:defRPr/>
-            </a:pPr>
-            <a:r>
-              <a:rPr lang="ru-RU" sz="2000" u="sng">
+            <a:endParaRPr dirty="0"/>
+          </a:p>
+          <a:p>
+            <a:pPr>
+              <a:defRPr/>
+            </a:pPr>
+            <a:r>
+              <a:rPr lang="ru-RU" sz="2000" u="sng" dirty="0">
                 <a:hlinkClick r:id="rId7" tooltip="почти всегда - ошибка программиста"/>
               </a:rPr>
               <a:t>доступ к переменной через указатель другого типа</a:t>
             </a:r>
             <a:r>
-              <a:rPr lang="ru-RU" sz="2000"/>
+              <a:rPr lang="ru-RU" sz="2000" dirty="0"/>
               <a:t>;</a:t>
             </a:r>
-            <a:endParaRPr/>
-          </a:p>
-          <a:p>
-            <a:pPr>
-              <a:defRPr/>
-            </a:pPr>
-            <a:r>
-              <a:rPr lang="ru-RU" sz="2000"/>
+            <a:endParaRPr dirty="0"/>
+          </a:p>
+          <a:p>
+            <a:pPr>
+              <a:defRPr/>
+            </a:pPr>
+            <a:r>
+              <a:rPr lang="ru-RU" sz="2000" dirty="0"/>
               <a:t>и т.д.</a:t>
             </a:r>
-            <a:endParaRPr/>
-          </a:p>
-          <a:p>
-            <a:pPr>
-              <a:defRPr/>
-            </a:pPr>
-            <a:endParaRPr lang="ru-RU" sz="2000"/>
+            <a:endParaRPr dirty="0"/>
+          </a:p>
+          <a:p>
+            <a:pPr>
+              <a:defRPr/>
+            </a:pPr>
+            <a:endParaRPr lang="ru-RU" sz="2000" dirty="0"/>
           </a:p>
         </p:txBody>
       </p:sp>
@@ -11957,10 +11976,10 @@
               <a:defRPr/>
             </a:pPr>
             <a:r>
-              <a:rPr lang="ru-RU"/>
-              <a:t>Выравнивание адреса</a:t>
-            </a:r>
-            <a:endParaRPr lang="en-US"/>
+              <a:rPr lang="ru-RU" dirty="0"/>
+              <a:t>Выравнивание</a:t>
+            </a:r>
+            <a:endParaRPr lang="en-US" dirty="0"/>
           </a:p>
         </p:txBody>
       </p:sp>
@@ -11989,30 +12008,30 @@
               <a:defRPr/>
             </a:pPr>
             <a:r>
-              <a:rPr lang="ru-RU" sz="2000"/>
+              <a:rPr lang="ru-RU" sz="2000" dirty="0"/>
               <a:t>Говорят, что данные </a:t>
             </a:r>
             <a:r>
-              <a:rPr lang="ru-RU" sz="2000" b="1"/>
+              <a:rPr lang="ru-RU" sz="2000" b="1" dirty="0"/>
               <a:t>выровнены</a:t>
             </a:r>
             <a:r>
-              <a:rPr lang="ru-RU" sz="2000"/>
+              <a:rPr lang="ru-RU" sz="2000" dirty="0"/>
               <a:t> по границе в </a:t>
             </a:r>
             <a:r>
-              <a:rPr lang="en-US" sz="2000"/>
+              <a:rPr lang="en-US" sz="2000" dirty="0"/>
               <a:t>N </a:t>
             </a:r>
             <a:r>
-              <a:rPr lang="ru-RU" sz="2000"/>
+              <a:rPr lang="ru-RU" sz="2000" dirty="0"/>
               <a:t>байт, если адрес данных делится без остатка на </a:t>
             </a:r>
             <a:r>
-              <a:rPr lang="en-US" sz="2000"/>
+              <a:rPr lang="en-US" sz="2000" dirty="0"/>
               <a:t>N.</a:t>
             </a:r>
-            <a:endParaRPr/>
+            <a:endParaRPr dirty="0"/>
           </a:p>
           <a:p>
             <a:pPr marL="0" indent="0">
@@ -12020,17 +12039,17 @@
               <a:defRPr/>
             </a:pPr>
             <a:r>
-              <a:rPr lang="ru-RU" sz="2000"/>
+              <a:rPr lang="ru-RU" sz="2000" dirty="0"/>
               <a:t>Обычно данные выравниваются по границе 2/4/8/16 байт.</a:t>
             </a:r>
-            <a:endParaRPr lang="en-US" sz="2000"/>
+            <a:endParaRPr lang="en-US" sz="2000" dirty="0"/>
           </a:p>
           <a:p>
             <a:pPr marL="0" indent="0">
               <a:buNone/>
               <a:defRPr/>
             </a:pPr>
-            <a:endParaRPr lang="en-US"/>
+            <a:endParaRPr lang="en-US" dirty="0"/>
           </a:p>
           <a:p>
             <a:pPr marL="0" indent="0">
@@ -12038,67 +12057,71 @@
               <a:defRPr/>
             </a:pPr>
             <a:r>
-              <a:rPr lang="ru-RU" sz="1800" i="1"/>
+              <a:rPr lang="ru-RU" sz="1800" i="1" dirty="0"/>
               <a:t>На рисунке: </a:t>
             </a:r>
             <a:br>
-              <a:rPr lang="ru-RU" sz="1800" i="1"/>
+              <a:rPr lang="ru-RU" sz="1800" i="1" dirty="0"/>
             </a:br>
             <a:r>
-              <a:rPr lang="ru-RU" sz="1800" i="1"/>
+              <a:rPr lang="ru-RU" sz="1800" i="1" dirty="0"/>
               <a:t>	</a:t>
             </a:r>
             <a:r>
-              <a:rPr lang="en-US" sz="1800" i="1"/>
-              <a:t>i </a:t>
-            </a:r>
-            <a:r>
-              <a:rPr lang="ru-RU" sz="1800" i="1"/>
+              <a:rPr lang="en-US" sz="1800" i="1" dirty="0" err="1"/>
+              <a:t>i</a:t>
+            </a:r>
+            <a:r>
+              <a:rPr lang="en-US" sz="1800" i="1" dirty="0"/>
+              <a:t> </a:t>
+            </a:r>
+            <a:r>
+              <a:rPr lang="ru-RU" sz="1800" i="1" dirty="0"/>
               <a:t>выровнена по границе в 2 и 4 байта,</a:t>
             </a:r>
             <a:br>
-              <a:rPr lang="ru-RU" sz="1800" i="1"/>
+              <a:rPr lang="ru-RU" sz="1800" i="1" dirty="0"/>
             </a:br>
             <a:r>
-              <a:rPr lang="en-US" sz="1800" i="1"/>
+              <a:rPr lang="en-US" sz="1800" i="1" dirty="0"/>
               <a:t> </a:t>
             </a:r>
             <a:r>
-              <a:rPr lang="ru-RU" sz="1800" i="1"/>
+              <a:rPr lang="ru-RU" sz="1800" i="1" dirty="0"/>
               <a:t>	</a:t>
             </a:r>
             <a:r>
-              <a:rPr lang="en-US" sz="1800" i="1"/>
+              <a:rPr lang="en-US" sz="1800" i="1" dirty="0"/>
               <a:t>j </a:t>
             </a:r>
             <a:r>
-              <a:rPr lang="ru-RU" sz="1800" i="1"/>
+              <a:rPr lang="ru-RU" sz="1800" i="1" dirty="0"/>
               <a:t>выровнена по границе 2 байта,</a:t>
             </a:r>
             <a:br>
-              <a:rPr lang="ru-RU" sz="1800" i="1"/>
+              <a:rPr lang="ru-RU" sz="1800" i="1" dirty="0"/>
             </a:br>
             <a:r>
-              <a:rPr lang="ru-RU" sz="1800" i="1"/>
+              <a:rPr lang="ru-RU" sz="1800" i="1" dirty="0"/>
               <a:t>	</a:t>
             </a:r>
             <a:r>
-              <a:rPr lang="en-US" sz="1800" i="1"/>
+              <a:rPr lang="en-US" sz="1800" i="1" dirty="0"/>
               <a:t>k </a:t>
             </a:r>
             <a:r>
-              <a:rPr lang="ru-RU" sz="1800" i="1"/>
+              <a:rPr lang="ru-RU" sz="1800" i="1" dirty="0"/>
               <a:t>выровнена по границе 2,4</a:t>
             </a:r>
             <a:r>
-              <a:rPr lang="en-US" sz="1800" i="1"/>
+              <a:rPr lang="en-US" sz="1800" i="1" dirty="0"/>
               <a:t>,</a:t>
             </a:r>
             <a:r>
-              <a:rPr lang="ru-RU" sz="1800" i="1"/>
+              <a:rPr lang="ru-RU" sz="1800" i="1" dirty="0"/>
               <a:t> 8 и 16 байт.</a:t>
             </a:r>
-            <a:endParaRPr lang="en-US" sz="1800" i="1"/>
+            <a:endParaRPr lang="en-US" sz="1800" i="1" dirty="0"/>
           </a:p>
         </p:txBody>
       </p:sp>
@@ -12612,14 +12635,14 @@
               <a:defRPr/>
             </a:pPr>
             <a:r>
-              <a:rPr lang="ru-RU" sz="2000" b="1"/>
+              <a:rPr lang="ru-RU" sz="2000" b="1" dirty="0"/>
               <a:t>Байт</a:t>
             </a:r>
             <a:r>
-              <a:rPr lang="ru-RU" sz="2000"/>
+              <a:rPr lang="ru-RU" sz="2000" dirty="0"/>
               <a:t> – минимальная адресуемая единица информации.</a:t>
             </a:r>
-            <a:endParaRPr/>
+            <a:endParaRPr dirty="0"/>
           </a:p>
           <a:p>
             <a:pPr marL="0" indent="0">
@@ -12627,10 +12650,10 @@
               <a:defRPr/>
             </a:pPr>
             <a:r>
-              <a:rPr lang="ru-RU" sz="2000"/>
+              <a:rPr lang="ru-RU" sz="2000" dirty="0"/>
               <a:t>Формально, каждый байт ОЗУ имеет свой адрес. Это верно только на программном уровне.</a:t>
             </a:r>
-            <a:endParaRPr/>
+            <a:endParaRPr dirty="0"/>
           </a:p>
           <a:p>
             <a:pPr marL="0" indent="0">
@@ -12638,34 +12661,41 @@
               <a:defRPr/>
             </a:pPr>
             <a:r>
-              <a:rPr lang="ru-RU" sz="2000"/>
+              <a:rPr lang="ru-RU" sz="2000" dirty="0"/>
               <a:t>На аппаратном уровне процессор соединен с ОЗУ шиной данных. В современных системах </a:t>
             </a:r>
             <a:r>
-              <a:rPr lang="en-US" sz="2000"/>
+              <a:rPr lang="en-US" sz="2000" dirty="0"/>
               <a:t>x86-64</a:t>
             </a:r>
             <a:r>
-              <a:rPr lang="ru-RU" sz="2000"/>
+              <a:rPr lang="ru-RU" sz="2000" dirty="0"/>
               <a:t> ширина шины данных равна 64 битам</a:t>
             </a:r>
             <a:r>
-              <a:rPr lang="en-US" sz="2000"/>
-              <a:t>1. (32 </a:t>
-            </a:r>
-            <a:r>
-              <a:rPr lang="ru-RU" sz="2000"/>
+              <a:rPr lang="en-US" sz="2000" dirty="0"/>
+              <a:t> </a:t>
+            </a:r>
+            <a:br>
+              <a:rPr lang="en-US" sz="2000" dirty="0"/>
+            </a:br>
+            <a:r>
+              <a:rPr lang="en-US" sz="2000" dirty="0"/>
+              <a:t>(32 </a:t>
+            </a:r>
+            <a:r>
+              <a:rPr lang="ru-RU" sz="2000" dirty="0"/>
               <a:t>битам для </a:t>
             </a:r>
             <a:r>
-              <a:rPr lang="en-US" sz="2000"/>
+              <a:rPr lang="en-US" sz="2000" dirty="0"/>
               <a:t>DDR5)</a:t>
             </a:r>
             <a:r>
-              <a:rPr lang="ru-RU" sz="2000"/>
+              <a:rPr lang="ru-RU" sz="2000" dirty="0"/>
               <a:t>. </a:t>
             </a:r>
-            <a:endParaRPr/>
+            <a:endParaRPr dirty="0"/>
           </a:p>
           <a:p>
             <a:pPr marL="0" indent="0">
@@ -12673,24 +12703,24 @@
               <a:defRPr/>
             </a:pPr>
             <a:r>
-              <a:rPr lang="ru-RU" sz="2000"/>
+              <a:rPr lang="ru-RU" sz="2000" dirty="0"/>
               <a:t>Оперативная память делится на блоки, каждый из которых равен ширине шины данных. Чтение данных выполняется  блоками (лишние данные не используются). Операции записи тоже оперируют блоками, но могут выполнять частичное изменение блока.</a:t>
             </a:r>
-            <a:endParaRPr/>
+            <a:endParaRPr dirty="0"/>
           </a:p>
           <a:p>
             <a:pPr marL="0" indent="0">
               <a:buNone/>
               <a:defRPr/>
             </a:pPr>
-            <a:endParaRPr lang="ru-RU" sz="2000"/>
+            <a:endParaRPr lang="ru-RU" sz="2000" dirty="0"/>
           </a:p>
           <a:p>
             <a:pPr marL="0" indent="0">
               <a:buNone/>
               <a:defRPr/>
             </a:pPr>
-            <a:endParaRPr lang="ru-RU" sz="2000"/>
+            <a:endParaRPr lang="ru-RU" sz="2000" dirty="0"/>
           </a:p>
         </p:txBody>
       </p:sp>
@@ -23756,16 +23786,25 @@
               <a:defRPr/>
             </a:pPr>
             <a:r>
-              <a:rPr lang="en-US" sz="1400" b="0">
+              <a:rPr lang="en-US" sz="1400" b="0" dirty="0" err="1">
                 <a:solidFill>
                   <a:srgbClr val="008080"/>
                 </a:solidFill>
                 <a:latin typeface="Consolas"/>
               </a:rPr>
-              <a:t>create_array(unsigned int):  </a:t>
-            </a:r>
-            <a:r>
-              <a:rPr lang="en-US" sz="1400" b="0">
+              <a:t>create_array</a:t>
+            </a:r>
+            <a:r>
+              <a:rPr lang="en-US" sz="1400" b="0" dirty="0">
+                <a:solidFill>
+                  <a:srgbClr val="008080"/>
+                </a:solidFill>
+                <a:latin typeface="Consolas"/>
+              </a:rPr>
+              <a:t>(unsigned int):  </a:t>
+            </a:r>
+            <a:r>
+              <a:rPr lang="en-US" sz="1400" b="0" dirty="0">
                 <a:solidFill>
                   <a:srgbClr val="008000"/>
                 </a:solidFill>
@@ -23774,7 +23813,7 @@
               <a:t>;size </a:t>
             </a:r>
             <a:r>
-              <a:rPr lang="ru-RU" sz="1400">
+              <a:rPr lang="ru-RU" sz="1400" dirty="0">
                 <a:solidFill>
                   <a:srgbClr val="008000"/>
                 </a:solidFill>
@@ -23783,7 +23822,7 @@
               <a:t>в</a:t>
             </a:r>
             <a:r>
-              <a:rPr lang="en-US" sz="1400" b="0">
+              <a:rPr lang="en-US" sz="1400" b="0" dirty="0">
                 <a:solidFill>
                   <a:srgbClr val="008000"/>
                 </a:solidFill>
@@ -23791,14 +23830,14 @@
               </a:rPr>
               <a:t> RCX </a:t>
             </a:r>
-            <a:endParaRPr/>
-          </a:p>
-          <a:p>
-            <a:pPr>
-              <a:defRPr/>
-            </a:pPr>
-            <a:r>
-              <a:rPr lang="en-US" sz="1400" b="0">
+            <a:endParaRPr dirty="0"/>
+          </a:p>
+          <a:p>
+            <a:pPr>
+              <a:defRPr/>
+            </a:pPr>
+            <a:r>
+              <a:rPr lang="en-US" sz="1400" b="0" dirty="0">
                 <a:solidFill>
                   <a:srgbClr val="000000"/>
                 </a:solidFill>
@@ -23807,7 +23846,7 @@
               <a:t>        </a:t>
             </a:r>
             <a:r>
-              <a:rPr lang="en-US" sz="1400" b="0">
+              <a:rPr lang="en-US" sz="1400" b="0" dirty="0">
                 <a:solidFill>
                   <a:srgbClr val="0000FF"/>
                 </a:solidFill>
@@ -23816,7 +23855,7 @@
               <a:t>push</a:t>
             </a:r>
             <a:r>
-              <a:rPr lang="en-US" sz="1400" b="0">
+              <a:rPr lang="en-US" sz="1400" b="0" dirty="0">
                 <a:solidFill>
                   <a:srgbClr val="000000"/>
                 </a:solidFill>
@@ -23825,7 +23864,7 @@
               <a:t>    </a:t>
             </a:r>
             <a:r>
-              <a:rPr lang="en-US" sz="1400" b="0">
+              <a:rPr lang="en-US" sz="1400" b="0" dirty="0" err="1">
                 <a:solidFill>
                   <a:srgbClr val="4864AA"/>
                 </a:solidFill>
@@ -23834,7 +23873,7 @@
               <a:t>rdi</a:t>
             </a:r>
             <a:r>
-              <a:rPr lang="ru-RU" sz="1400" b="0">
+              <a:rPr lang="ru-RU" sz="1400" b="0" dirty="0">
                 <a:solidFill>
                   <a:srgbClr val="4864AA"/>
                 </a:solidFill>
@@ -23842,7 +23881,7 @@
               </a:rPr>
               <a:t> </a:t>
             </a:r>
-            <a:endParaRPr lang="en-US" sz="1400" b="0">
+            <a:endParaRPr lang="en-US" sz="1400" b="0" dirty="0">
               <a:solidFill>
                 <a:srgbClr val="000000"/>
               </a:solidFill>
@@ -23854,7 +23893,7 @@
               <a:defRPr/>
             </a:pPr>
             <a:r>
-              <a:rPr lang="en-US" sz="1400" b="0">
+              <a:rPr lang="en-US" sz="1400" b="0" dirty="0">
                 <a:solidFill>
                   <a:srgbClr val="000000"/>
                 </a:solidFill>
@@ -23863,7 +23902,7 @@
               <a:t>        </a:t>
             </a:r>
             <a:r>
-              <a:rPr lang="en-US" sz="1400" b="0">
+              <a:rPr lang="en-US" sz="1400" b="0" dirty="0">
                 <a:solidFill>
                   <a:srgbClr val="0000FF"/>
                 </a:solidFill>
@@ -23872,7 +23911,7 @@
               <a:t>push</a:t>
             </a:r>
             <a:r>
-              <a:rPr lang="en-US" sz="1400" b="0">
+              <a:rPr lang="en-US" sz="1400" b="0" dirty="0">
                 <a:solidFill>
                   <a:srgbClr val="000000"/>
                 </a:solidFill>
@@ -23881,7 +23920,7 @@
               <a:t>    </a:t>
             </a:r>
             <a:r>
-              <a:rPr lang="en-US" sz="1400" b="0">
+              <a:rPr lang="en-US" sz="1400" b="0" dirty="0" err="1">
                 <a:solidFill>
                   <a:srgbClr val="4864AA"/>
                 </a:solidFill>
@@ -23889,7 +23928,7 @@
               </a:rPr>
               <a:t>rsi</a:t>
             </a:r>
-            <a:endParaRPr lang="en-US" sz="1400" b="0">
+            <a:endParaRPr lang="en-US" sz="1400" b="0" dirty="0">
               <a:solidFill>
                 <a:srgbClr val="000000"/>
               </a:solidFill>
@@ -23901,7 +23940,7 @@
               <a:defRPr/>
             </a:pPr>
             <a:r>
-              <a:rPr lang="en-US" sz="1400" b="0">
+              <a:rPr lang="en-US" sz="1400" b="0" dirty="0">
                 <a:solidFill>
                   <a:srgbClr val="000000"/>
                 </a:solidFill>
@@ -23910,7 +23949,7 @@
               <a:t>        </a:t>
             </a:r>
             <a:r>
-              <a:rPr lang="en-US" sz="1400" b="0">
+              <a:rPr lang="en-US" sz="1400" b="0" dirty="0">
                 <a:solidFill>
                   <a:srgbClr val="0000FF"/>
                 </a:solidFill>
@@ -23919,7 +23958,7 @@
               <a:t>push</a:t>
             </a:r>
             <a:r>
-              <a:rPr lang="en-US" sz="1400" b="0">
+              <a:rPr lang="en-US" sz="1400" b="0" dirty="0">
                 <a:solidFill>
                   <a:srgbClr val="000000"/>
                 </a:solidFill>
@@ -23928,7 +23967,7 @@
               <a:t>    </a:t>
             </a:r>
             <a:r>
-              <a:rPr lang="en-US" sz="1400" b="0">
+              <a:rPr lang="en-US" sz="1400" b="0" dirty="0" err="1">
                 <a:solidFill>
                   <a:srgbClr val="4864AA"/>
                 </a:solidFill>
@@ -23936,7 +23975,7 @@
               </a:rPr>
               <a:t>rbx</a:t>
             </a:r>
-            <a:endParaRPr lang="en-US" sz="1400" b="0">
+            <a:endParaRPr lang="en-US" sz="1400" b="0" dirty="0">
               <a:solidFill>
                 <a:srgbClr val="000000"/>
               </a:solidFill>
@@ -23948,7 +23987,7 @@
               <a:defRPr/>
             </a:pPr>
             <a:r>
-              <a:rPr lang="en-US" sz="1400" b="0">
+              <a:rPr lang="en-US" sz="1400" b="0" dirty="0">
                 <a:solidFill>
                   <a:srgbClr val="000000"/>
                 </a:solidFill>
@@ -23957,7 +23996,7 @@
               <a:t>        </a:t>
             </a:r>
             <a:r>
-              <a:rPr lang="en-US" sz="1400" b="0">
+              <a:rPr lang="en-US" sz="1400" b="0" dirty="0">
                 <a:solidFill>
                   <a:srgbClr val="0000FF"/>
                 </a:solidFill>
@@ -23966,7 +24005,7 @@
               <a:t>sub</a:t>
             </a:r>
             <a:r>
-              <a:rPr lang="en-US" sz="1400" b="0">
+              <a:rPr lang="en-US" sz="1400" b="0" dirty="0">
                 <a:solidFill>
                   <a:srgbClr val="000000"/>
                 </a:solidFill>
@@ -23975,7 +24014,7 @@
               <a:t>     </a:t>
             </a:r>
             <a:r>
-              <a:rPr lang="en-US" sz="1400" b="0">
+              <a:rPr lang="en-US" sz="1400" b="0" dirty="0" err="1">
                 <a:solidFill>
                   <a:srgbClr val="4864AA"/>
                 </a:solidFill>
@@ -23984,7 +24023,7 @@
               <a:t>rsp</a:t>
             </a:r>
             <a:r>
-              <a:rPr lang="en-US" sz="1400" b="0">
+              <a:rPr lang="en-US" sz="1400" b="0" dirty="0">
                 <a:solidFill>
                   <a:srgbClr val="000000"/>
                 </a:solidFill>
@@ -23993,7 +24032,7 @@
               <a:t>, </a:t>
             </a:r>
             <a:r>
-              <a:rPr lang="en-US" sz="1400" b="0">
+              <a:rPr lang="en-US" sz="1400" b="0" dirty="0">
                 <a:solidFill>
                   <a:srgbClr val="098658"/>
                 </a:solidFill>
@@ -24002,7 +24041,7 @@
               <a:t>32</a:t>
             </a:r>
             <a:r>
-              <a:rPr lang="ru-RU" sz="1400" b="0">
+              <a:rPr lang="ru-RU" sz="1400" b="0" dirty="0">
                 <a:solidFill>
                   <a:srgbClr val="098658"/>
                 </a:solidFill>
@@ -24011,7 +24050,7 @@
               <a:t> </a:t>
             </a:r>
             <a:r>
-              <a:rPr lang="en-US" sz="1400" b="0">
+              <a:rPr lang="en-US" sz="1400" b="0" dirty="0">
                 <a:solidFill>
                   <a:srgbClr val="008000"/>
                 </a:solidFill>
@@ -24019,14 +24058,14 @@
               </a:rPr>
               <a:t>; PROLOGUE END</a:t>
             </a:r>
-            <a:endParaRPr/>
-          </a:p>
-          <a:p>
-            <a:pPr>
-              <a:defRPr/>
-            </a:pPr>
-            <a:r>
-              <a:rPr lang="en-US" sz="1400" b="0">
+            <a:endParaRPr dirty="0"/>
+          </a:p>
+          <a:p>
+            <a:pPr>
+              <a:defRPr/>
+            </a:pPr>
+            <a:r>
+              <a:rPr lang="en-US" sz="1400" b="0" dirty="0">
                 <a:solidFill>
                   <a:srgbClr val="000000"/>
                 </a:solidFill>
@@ -24035,7 +24074,7 @@
               <a:t>        </a:t>
             </a:r>
             <a:r>
-              <a:rPr lang="en-US" sz="1400" b="0">
+              <a:rPr lang="en-US" sz="1400" b="0" dirty="0">
                 <a:solidFill>
                   <a:srgbClr val="0000FF"/>
                 </a:solidFill>
@@ -24044,7 +24083,7 @@
               <a:t>mov</a:t>
             </a:r>
             <a:r>
-              <a:rPr lang="en-US" sz="1400" b="0">
+              <a:rPr lang="en-US" sz="1400" b="0" dirty="0">
                 <a:solidFill>
                   <a:srgbClr val="000000"/>
                 </a:solidFill>
@@ -24053,7 +24092,7 @@
               <a:t>     </a:t>
             </a:r>
             <a:r>
-              <a:rPr lang="en-US" sz="1400" b="0">
+              <a:rPr lang="en-US" sz="1400" b="0" dirty="0" err="1">
                 <a:solidFill>
                   <a:srgbClr val="4864AA"/>
                 </a:solidFill>
@@ -24062,7 +24101,7 @@
               <a:t>ebx</a:t>
             </a:r>
             <a:r>
-              <a:rPr lang="en-US" sz="1400" b="0">
+              <a:rPr lang="en-US" sz="1400" b="0" dirty="0">
                 <a:solidFill>
                   <a:srgbClr val="000000"/>
                 </a:solidFill>
@@ -24071,7 +24110,7 @@
               <a:t>, </a:t>
             </a:r>
             <a:r>
-              <a:rPr lang="en-US" sz="1400" b="0">
+              <a:rPr lang="en-US" sz="1400" b="0" dirty="0" err="1">
                 <a:solidFill>
                   <a:srgbClr val="4864AA"/>
                 </a:solidFill>
@@ -24079,7 +24118,7 @@
               </a:rPr>
               <a:t>ecx</a:t>
             </a:r>
-            <a:endParaRPr lang="en-US" sz="1400" b="0">
+            <a:endParaRPr lang="en-US" sz="1400" b="0" dirty="0">
               <a:solidFill>
                 <a:srgbClr val="000000"/>
               </a:solidFill>
@@ -24091,7 +24130,7 @@
               <a:defRPr/>
             </a:pPr>
             <a:r>
-              <a:rPr lang="en-US" sz="1400" b="0">
+              <a:rPr lang="en-US" sz="1400" b="0" dirty="0">
                 <a:solidFill>
                   <a:srgbClr val="000000"/>
                 </a:solidFill>
@@ -24100,7 +24139,7 @@
               <a:t>        </a:t>
             </a:r>
             <a:r>
-              <a:rPr lang="en-US" sz="1400" b="0">
+              <a:rPr lang="en-US" sz="1400" b="0" dirty="0">
                 <a:solidFill>
                   <a:srgbClr val="0000FF"/>
                 </a:solidFill>
@@ -24109,7 +24148,7 @@
               <a:t>lea</a:t>
             </a:r>
             <a:r>
-              <a:rPr lang="en-US" sz="1400" b="0">
+              <a:rPr lang="en-US" sz="1400" b="0" dirty="0">
                 <a:solidFill>
                   <a:srgbClr val="000000"/>
                 </a:solidFill>
@@ -24118,7 +24157,7 @@
               <a:t>     </a:t>
             </a:r>
             <a:r>
-              <a:rPr lang="en-US" sz="1400" b="0">
+              <a:rPr lang="en-US" sz="1400" b="0" dirty="0" err="1">
                 <a:solidFill>
                   <a:srgbClr val="4864AA"/>
                 </a:solidFill>
@@ -24127,7 +24166,7 @@
               <a:t>rcx</a:t>
             </a:r>
             <a:r>
-              <a:rPr lang="en-US" sz="1400" b="0">
+              <a:rPr lang="en-US" sz="1400" b="0" dirty="0">
                 <a:solidFill>
                   <a:srgbClr val="000000"/>
                 </a:solidFill>
@@ -24136,7 +24175,7 @@
               <a:t>, [</a:t>
             </a:r>
             <a:r>
-              <a:rPr lang="en-US" sz="1400" b="0">
+              <a:rPr lang="en-US" sz="1400" b="0" dirty="0">
                 <a:solidFill>
                   <a:srgbClr val="098658"/>
                 </a:solidFill>
@@ -24145,7 +24184,7 @@
               <a:t>8</a:t>
             </a:r>
             <a:r>
-              <a:rPr lang="en-US" sz="1400" b="0">
+              <a:rPr lang="en-US" sz="1400" b="0" dirty="0">
                 <a:solidFill>
                   <a:srgbClr val="000000"/>
                 </a:solidFill>
@@ -24154,7 +24193,7 @@
               <a:t>+</a:t>
             </a:r>
             <a:r>
-              <a:rPr lang="en-US" sz="1400" b="0">
+              <a:rPr lang="en-US" sz="1400" b="0" dirty="0">
                 <a:solidFill>
                   <a:srgbClr val="4864AA"/>
                 </a:solidFill>
@@ -24163,7 +24202,7 @@
               <a:t>rbx</a:t>
             </a:r>
             <a:r>
-              <a:rPr lang="en-US" sz="1400" b="0">
+              <a:rPr lang="en-US" sz="1400" b="0" dirty="0">
                 <a:solidFill>
                   <a:srgbClr val="000000"/>
                 </a:solidFill>
@@ -24172,7 +24211,7 @@
               <a:t>*</a:t>
             </a:r>
             <a:r>
-              <a:rPr lang="en-US" sz="1400" b="0">
+              <a:rPr lang="en-US" sz="1400" b="0" dirty="0">
                 <a:solidFill>
                   <a:srgbClr val="098658"/>
                 </a:solidFill>
@@ -24181,7 +24220,7 @@
               <a:t>4</a:t>
             </a:r>
             <a:r>
-              <a:rPr lang="en-US" sz="1400" b="0">
+              <a:rPr lang="en-US" sz="1400" b="0" dirty="0">
                 <a:solidFill>
                   <a:srgbClr val="000000"/>
                 </a:solidFill>
@@ -24190,7 +24229,7 @@
               <a:t>] </a:t>
             </a:r>
             <a:r>
-              <a:rPr lang="en-US" sz="1400" b="0">
+              <a:rPr lang="en-US" sz="1400" b="0" dirty="0">
                 <a:solidFill>
                   <a:srgbClr val="008000"/>
                 </a:solidFill>
@@ -24199,7 +24238,7 @@
               <a:t>; </a:t>
             </a:r>
             <a:r>
-              <a:rPr lang="ru-RU" sz="1400" b="0">
+              <a:rPr lang="ru-RU" sz="1400" b="0" dirty="0">
                 <a:solidFill>
                   <a:srgbClr val="008000"/>
                 </a:solidFill>
@@ -24207,7 +24246,7 @@
               </a:rPr>
               <a:t>общий размер в байтах</a:t>
             </a:r>
-            <a:endParaRPr lang="en-US" sz="1400" b="0">
+            <a:endParaRPr lang="en-US" sz="1400" b="0" dirty="0">
               <a:solidFill>
                 <a:srgbClr val="000000"/>
               </a:solidFill>
@@ -24219,7 +24258,7 @@
               <a:defRPr/>
             </a:pPr>
             <a:r>
-              <a:rPr lang="en-US" sz="1400" b="0">
+              <a:rPr lang="en-US" sz="1400" b="0" dirty="0">
                 <a:solidFill>
                   <a:srgbClr val="000000"/>
                 </a:solidFill>
@@ -24228,7 +24267,7 @@
               <a:t>        </a:t>
             </a:r>
             <a:r>
-              <a:rPr lang="en-US" sz="1400" b="0">
+              <a:rPr lang="en-US" sz="1400" b="0" dirty="0">
                 <a:solidFill>
                   <a:srgbClr val="0000FF"/>
                 </a:solidFill>
@@ -24237,7 +24276,7 @@
               <a:t>call</a:t>
             </a:r>
             <a:r>
-              <a:rPr lang="en-US" sz="1400" b="0">
+              <a:rPr lang="en-US" sz="1400" b="0" dirty="0">
                 <a:solidFill>
                   <a:srgbClr val="000000"/>
                 </a:solidFill>
@@ -24246,7 +24285,7 @@
               <a:t>    </a:t>
             </a:r>
             <a:r>
-              <a:rPr lang="en-US" sz="1400" b="0">
+              <a:rPr lang="en-US" sz="1400" b="0" dirty="0">
                 <a:solidFill>
                   <a:srgbClr val="008080"/>
                 </a:solidFill>
@@ -24255,7 +24294,7 @@
               <a:t>operator</a:t>
             </a:r>
             <a:r>
-              <a:rPr lang="en-US" sz="1400" b="0">
+              <a:rPr lang="en-US" sz="1400" b="0" dirty="0">
                 <a:solidFill>
                   <a:srgbClr val="000000"/>
                 </a:solidFill>
@@ -24264,7 +24303,7 @@
               <a:t> </a:t>
             </a:r>
             <a:r>
-              <a:rPr lang="en-US" sz="1400" b="0">
+              <a:rPr lang="en-US" sz="1400" b="0" dirty="0">
                 <a:solidFill>
                   <a:srgbClr val="008080"/>
                 </a:solidFill>
@@ -24273,7 +24312,7 @@
               <a:t>new</a:t>
             </a:r>
             <a:r>
-              <a:rPr lang="en-US" sz="1400" b="0">
+              <a:rPr lang="en-US" sz="1400" b="0" dirty="0">
                 <a:solidFill>
                   <a:srgbClr val="000000"/>
                 </a:solidFill>
@@ -24282,7 +24321,7 @@
               <a:t>[](</a:t>
             </a:r>
             <a:r>
-              <a:rPr lang="en-US" sz="1400" b="0">
+              <a:rPr lang="en-US" sz="1400" b="0" dirty="0">
                 <a:solidFill>
                   <a:srgbClr val="008080"/>
                 </a:solidFill>
@@ -24291,7 +24330,7 @@
               <a:t>unsigned</a:t>
             </a:r>
             <a:r>
-              <a:rPr lang="en-US" sz="1400" b="0">
+              <a:rPr lang="en-US" sz="1400" b="0" dirty="0">
                 <a:solidFill>
                   <a:srgbClr val="000000"/>
                 </a:solidFill>
@@ -24300,7 +24339,7 @@
               <a:t> </a:t>
             </a:r>
             <a:r>
-              <a:rPr lang="en-US" sz="1400" b="0">
+              <a:rPr lang="en-US" sz="1400" b="0" dirty="0">
                 <a:solidFill>
                   <a:srgbClr val="008080"/>
                 </a:solidFill>
@@ -24309,7 +24348,7 @@
               <a:t>long</a:t>
             </a:r>
             <a:r>
-              <a:rPr lang="en-US" sz="1400" b="0">
+              <a:rPr lang="en-US" sz="1400" b="0" dirty="0">
                 <a:solidFill>
                   <a:srgbClr val="000000"/>
                 </a:solidFill>
@@ -24317,14 +24356,14 @@
               </a:rPr>
               <a:t>)</a:t>
             </a:r>
-            <a:endParaRPr/>
-          </a:p>
-          <a:p>
-            <a:pPr>
-              <a:defRPr/>
-            </a:pPr>
-            <a:r>
-              <a:rPr lang="en-US" sz="1400" b="0">
+            <a:endParaRPr dirty="0"/>
+          </a:p>
+          <a:p>
+            <a:pPr>
+              <a:defRPr/>
+            </a:pPr>
+            <a:r>
+              <a:rPr lang="en-US" sz="1400" b="0" dirty="0">
                 <a:solidFill>
                   <a:srgbClr val="000000"/>
                 </a:solidFill>
@@ -24333,7 +24372,7 @@
               <a:t>        </a:t>
             </a:r>
             <a:r>
-              <a:rPr lang="en-US" sz="1400" b="0">
+              <a:rPr lang="en-US" sz="1400" b="0" dirty="0">
                 <a:solidFill>
                   <a:srgbClr val="0000FF"/>
                 </a:solidFill>
@@ -24342,7 +24381,7 @@
               <a:t>mov</a:t>
             </a:r>
             <a:r>
-              <a:rPr lang="en-US" sz="1400" b="0">
+              <a:rPr lang="en-US" sz="1400" b="0" dirty="0">
                 <a:solidFill>
                   <a:srgbClr val="000000"/>
                 </a:solidFill>
@@ -24351,7 +24390,7 @@
               <a:t>     </a:t>
             </a:r>
             <a:r>
-              <a:rPr lang="en-US" sz="1400" b="0">
+              <a:rPr lang="en-US" sz="1400" b="0" dirty="0">
                 <a:solidFill>
                   <a:srgbClr val="808080"/>
                 </a:solidFill>
@@ -24360,7 +24399,7 @@
               <a:t>QWORD</a:t>
             </a:r>
             <a:r>
-              <a:rPr lang="en-US" sz="1400" b="0">
+              <a:rPr lang="en-US" sz="1400" b="0" dirty="0">
                 <a:solidFill>
                   <a:srgbClr val="000000"/>
                 </a:solidFill>
@@ -24369,7 +24408,7 @@
               <a:t> </a:t>
             </a:r>
             <a:r>
-              <a:rPr lang="en-US" sz="1400" b="0">
+              <a:rPr lang="en-US" sz="1400" b="0" dirty="0">
                 <a:solidFill>
                   <a:srgbClr val="808080"/>
                 </a:solidFill>
@@ -24378,7 +24417,7 @@
               <a:t>PTR</a:t>
             </a:r>
             <a:r>
-              <a:rPr lang="en-US" sz="1400" b="0">
+              <a:rPr lang="en-US" sz="1400" b="0" dirty="0">
                 <a:solidFill>
                   <a:srgbClr val="000000"/>
                 </a:solidFill>
@@ -24387,7 +24426,7 @@
               <a:t> [</a:t>
             </a:r>
             <a:r>
-              <a:rPr lang="en-US" sz="1400" b="0">
+              <a:rPr lang="en-US" sz="1400" b="0" dirty="0" err="1">
                 <a:solidFill>
                   <a:srgbClr val="4864AA"/>
                 </a:solidFill>
@@ -24396,7 +24435,7 @@
               <a:t>rax</a:t>
             </a:r>
             <a:r>
-              <a:rPr lang="en-US" sz="1400" b="0">
+              <a:rPr lang="en-US" sz="1400" b="0" dirty="0">
                 <a:solidFill>
                   <a:srgbClr val="000000"/>
                 </a:solidFill>
@@ -24405,7 +24444,7 @@
               <a:t>], </a:t>
             </a:r>
             <a:r>
-              <a:rPr lang="en-US" sz="1400" b="0">
+              <a:rPr lang="en-US" sz="1400" b="0" dirty="0" err="1">
                 <a:solidFill>
                   <a:srgbClr val="4864AA"/>
                 </a:solidFill>
@@ -24413,7 +24452,7 @@
               </a:rPr>
               <a:t>rbx</a:t>
             </a:r>
-            <a:endParaRPr lang="en-US" sz="1400" b="0">
+            <a:endParaRPr lang="en-US" sz="1400" b="0" dirty="0">
               <a:solidFill>
                 <a:srgbClr val="000000"/>
               </a:solidFill>
@@ -24425,7 +24464,7 @@
               <a:defRPr/>
             </a:pPr>
             <a:r>
-              <a:rPr lang="en-US" sz="1400" b="0">
+              <a:rPr lang="en-US" sz="1400" b="0" dirty="0">
                 <a:solidFill>
                   <a:srgbClr val="000000"/>
                 </a:solidFill>
@@ -24434,7 +24473,7 @@
               <a:t>        </a:t>
             </a:r>
             <a:r>
-              <a:rPr lang="en-US" sz="1400" b="0">
+              <a:rPr lang="en-US" sz="1400" b="0" dirty="0">
                 <a:solidFill>
                   <a:srgbClr val="0000FF"/>
                 </a:solidFill>
@@ -24443,7 +24482,7 @@
               <a:t>lea</a:t>
             </a:r>
             <a:r>
-              <a:rPr lang="en-US" sz="1400" b="0">
+              <a:rPr lang="en-US" sz="1400" b="0" dirty="0">
                 <a:solidFill>
                   <a:srgbClr val="000000"/>
                 </a:solidFill>
@@ -24452,7 +24491,7 @@
               <a:t>     </a:t>
             </a:r>
             <a:r>
-              <a:rPr lang="en-US" sz="1400" b="0">
+              <a:rPr lang="en-US" sz="1400" b="0" dirty="0" err="1">
                 <a:solidFill>
                   <a:srgbClr val="4864AA"/>
                 </a:solidFill>
@@ -24461,7 +24500,7 @@
               <a:t>rdi</a:t>
             </a:r>
             <a:r>
-              <a:rPr lang="en-US" sz="1400" b="0">
+              <a:rPr lang="en-US" sz="1400" b="0" dirty="0">
                 <a:solidFill>
                   <a:srgbClr val="000000"/>
                 </a:solidFill>
@@ -24470,7 +24509,7 @@
               <a:t>, [</a:t>
             </a:r>
             <a:r>
-              <a:rPr lang="en-US" sz="1400" b="0">
+              <a:rPr lang="en-US" sz="1400" b="0" dirty="0">
                 <a:solidFill>
                   <a:srgbClr val="4864AA"/>
                 </a:solidFill>
@@ -24479,7 +24518,7 @@
               <a:t>rax</a:t>
             </a:r>
             <a:r>
-              <a:rPr lang="en-US" sz="1400" b="0">
+              <a:rPr lang="en-US" sz="1400" b="0" dirty="0">
                 <a:solidFill>
                   <a:srgbClr val="000000"/>
                 </a:solidFill>
@@ -24488,7 +24527,7 @@
               <a:t>+</a:t>
             </a:r>
             <a:r>
-              <a:rPr lang="en-US" sz="1400" b="0">
+              <a:rPr lang="en-US" sz="1400" b="0" dirty="0">
                 <a:solidFill>
                   <a:srgbClr val="098658"/>
                 </a:solidFill>
@@ -24497,7 +24536,7 @@
               <a:t>8</a:t>
             </a:r>
             <a:r>
-              <a:rPr lang="en-US" sz="1400" b="0">
+              <a:rPr lang="en-US" sz="1400" b="0" dirty="0">
                 <a:solidFill>
                   <a:srgbClr val="000000"/>
                 </a:solidFill>
@@ -24505,14 +24544,14 @@
               </a:rPr>
               <a:t>]</a:t>
             </a:r>
-            <a:endParaRPr/>
-          </a:p>
-          <a:p>
-            <a:pPr>
-              <a:defRPr/>
-            </a:pPr>
-            <a:r>
-              <a:rPr lang="en-US" sz="1400" b="0">
+            <a:endParaRPr dirty="0"/>
+          </a:p>
+          <a:p>
+            <a:pPr>
+              <a:defRPr/>
+            </a:pPr>
+            <a:r>
+              <a:rPr lang="en-US" sz="1400" b="0" dirty="0">
                 <a:solidFill>
                   <a:srgbClr val="000000"/>
                 </a:solidFill>
@@ -24521,7 +24560,7 @@
               <a:t>        </a:t>
             </a:r>
             <a:r>
-              <a:rPr lang="en-US" sz="1400" b="0">
+              <a:rPr lang="en-US" sz="1400" b="0" dirty="0">
                 <a:solidFill>
                   <a:srgbClr val="0000FF"/>
                 </a:solidFill>
@@ -24530,7 +24569,7 @@
               <a:t>sub</a:t>
             </a:r>
             <a:r>
-              <a:rPr lang="en-US" sz="1400" b="0">
+              <a:rPr lang="en-US" sz="1400" b="0" dirty="0">
                 <a:solidFill>
                   <a:srgbClr val="000000"/>
                 </a:solidFill>
@@ -24539,7 +24578,7 @@
               <a:t>     </a:t>
             </a:r>
             <a:r>
-              <a:rPr lang="en-US" sz="1400" b="0">
+              <a:rPr lang="en-US" sz="1400" b="0" dirty="0" err="1">
                 <a:solidFill>
                   <a:srgbClr val="4864AA"/>
                 </a:solidFill>
@@ -24548,7 +24587,7 @@
               <a:t>rbx</a:t>
             </a:r>
             <a:r>
-              <a:rPr lang="en-US" sz="1400" b="0">
+              <a:rPr lang="en-US" sz="1400" b="0" dirty="0">
                 <a:solidFill>
                   <a:srgbClr val="000000"/>
                 </a:solidFill>
@@ -24557,7 +24596,7 @@
               <a:t>, </a:t>
             </a:r>
             <a:r>
-              <a:rPr lang="en-US" sz="1400" b="0">
+              <a:rPr lang="en-US" sz="1400" b="0" dirty="0">
                 <a:solidFill>
                   <a:srgbClr val="098658"/>
                 </a:solidFill>
@@ -24565,7 +24604,7 @@
               </a:rPr>
               <a:t>1</a:t>
             </a:r>
-            <a:endParaRPr lang="en-US" sz="1400" b="0">
+            <a:endParaRPr lang="en-US" sz="1400" b="0" dirty="0">
               <a:solidFill>
                 <a:srgbClr val="000000"/>
               </a:solidFill>
@@ -24577,7 +24616,7 @@
               <a:defRPr/>
             </a:pPr>
             <a:r>
-              <a:rPr lang="en-US" sz="1400" b="0">
+              <a:rPr lang="en-US" sz="1400" b="0" dirty="0">
                 <a:solidFill>
                   <a:srgbClr val="000000"/>
                 </a:solidFill>
@@ -24586,7 +24625,7 @@
               <a:t>        </a:t>
             </a:r>
             <a:r>
-              <a:rPr lang="en-US" sz="1400" b="0">
+              <a:rPr lang="en-US" sz="1400" b="0" dirty="0" err="1">
                 <a:solidFill>
                   <a:srgbClr val="0000FF"/>
                 </a:solidFill>
@@ -24595,7 +24634,7 @@
               <a:t>js</a:t>
             </a:r>
             <a:r>
-              <a:rPr lang="en-US" sz="1400" b="0">
+              <a:rPr lang="en-US" sz="1400" b="0" dirty="0">
                 <a:solidFill>
                   <a:srgbClr val="000000"/>
                 </a:solidFill>
@@ -24604,7 +24643,7 @@
               <a:t>      </a:t>
             </a:r>
             <a:r>
-              <a:rPr lang="en-US" sz="1400" b="0">
+              <a:rPr lang="en-US" sz="1400" b="0" dirty="0">
                 <a:solidFill>
                   <a:srgbClr val="008080"/>
                 </a:solidFill>
@@ -24612,7 +24651,7 @@
               </a:rPr>
               <a:t>.L9</a:t>
             </a:r>
-            <a:endParaRPr lang="en-US" sz="1400" b="0">
+            <a:endParaRPr lang="en-US" sz="1400" b="0" dirty="0">
               <a:solidFill>
                 <a:srgbClr val="000000"/>
               </a:solidFill>
@@ -24624,7 +24663,7 @@
               <a:defRPr/>
             </a:pPr>
             <a:r>
-              <a:rPr lang="en-US" sz="1400" b="0">
+              <a:rPr lang="en-US" sz="1400" b="0" dirty="0">
                 <a:solidFill>
                   <a:srgbClr val="000000"/>
                 </a:solidFill>
@@ -24633,7 +24672,7 @@
               <a:t>        </a:t>
             </a:r>
             <a:r>
-              <a:rPr lang="en-US" sz="1400" b="0">
+              <a:rPr lang="en-US" sz="1400" b="0" dirty="0">
                 <a:solidFill>
                   <a:srgbClr val="0000FF"/>
                 </a:solidFill>
@@ -24642,7 +24681,7 @@
               <a:t>mov</a:t>
             </a:r>
             <a:r>
-              <a:rPr lang="en-US" sz="1400" b="0">
+              <a:rPr lang="en-US" sz="1400" b="0" dirty="0">
                 <a:solidFill>
                   <a:srgbClr val="000000"/>
                 </a:solidFill>
@@ -24651,7 +24690,7 @@
               <a:t>     </a:t>
             </a:r>
             <a:r>
-              <a:rPr lang="en-US" sz="1400" b="0">
+              <a:rPr lang="en-US" sz="1400" b="0" dirty="0" err="1">
                 <a:solidFill>
                   <a:srgbClr val="4864AA"/>
                 </a:solidFill>
@@ -24660,7 +24699,7 @@
               <a:t>rsi</a:t>
             </a:r>
             <a:r>
-              <a:rPr lang="en-US" sz="1400" b="0">
+              <a:rPr lang="en-US" sz="1400" b="0" dirty="0">
                 <a:solidFill>
                   <a:srgbClr val="000000"/>
                 </a:solidFill>
@@ -24669,7 +24708,7 @@
               <a:t>, </a:t>
             </a:r>
             <a:r>
-              <a:rPr lang="en-US" sz="1400" b="0">
+              <a:rPr lang="en-US" sz="1400" b="0" dirty="0" err="1">
                 <a:solidFill>
                   <a:srgbClr val="4864AA"/>
                 </a:solidFill>
@@ -24677,7 +24716,7 @@
               </a:rPr>
               <a:t>rdi</a:t>
             </a:r>
-            <a:endParaRPr lang="en-US" sz="1400" b="0">
+            <a:endParaRPr lang="en-US" sz="1400" b="0" dirty="0">
               <a:solidFill>
                 <a:srgbClr val="000000"/>
               </a:solidFill>
@@ -24689,7 +24728,7 @@
               <a:defRPr/>
             </a:pPr>
             <a:r>
-              <a:rPr lang="en-US" sz="1400" b="0">
+              <a:rPr lang="en-US" sz="1400" b="0" dirty="0">
                 <a:solidFill>
                   <a:srgbClr val="008080"/>
                 </a:solidFill>
@@ -24698,7 +24737,7 @@
               <a:t>.L11:</a:t>
             </a:r>
             <a:r>
-              <a:rPr lang="en-US" sz="1400" b="0">
+              <a:rPr lang="en-US" sz="1400" b="0" dirty="0">
                 <a:solidFill>
                   <a:srgbClr val="000000"/>
                 </a:solidFill>
@@ -24707,7 +24746,7 @@
               <a:t>   </a:t>
             </a:r>
             <a:r>
-              <a:rPr lang="en-US" sz="1400" b="0">
+              <a:rPr lang="en-US" sz="1400" b="0" dirty="0">
                 <a:solidFill>
                   <a:srgbClr val="0000FF"/>
                 </a:solidFill>
@@ -24716,7 +24755,7 @@
               <a:t>mov</a:t>
             </a:r>
             <a:r>
-              <a:rPr lang="en-US" sz="1400" b="0">
+              <a:rPr lang="en-US" sz="1400" b="0" dirty="0">
                 <a:solidFill>
                   <a:srgbClr val="000000"/>
                 </a:solidFill>
@@ -24725,7 +24764,7 @@
               <a:t>     </a:t>
             </a:r>
             <a:r>
-              <a:rPr lang="en-US" sz="1400" b="0">
+              <a:rPr lang="en-US" sz="1400" b="0" dirty="0" err="1">
                 <a:solidFill>
                   <a:srgbClr val="4864AA"/>
                 </a:solidFill>
@@ -24734,7 +24773,7 @@
               <a:t>rcx</a:t>
             </a:r>
             <a:r>
-              <a:rPr lang="en-US" sz="1400" b="0">
+              <a:rPr lang="en-US" sz="1400" b="0" dirty="0">
                 <a:solidFill>
                   <a:srgbClr val="000000"/>
                 </a:solidFill>
@@ -24743,7 +24782,7 @@
               <a:t>, </a:t>
             </a:r>
             <a:r>
-              <a:rPr lang="en-US" sz="1400" b="0">
+              <a:rPr lang="en-US" sz="1400" b="0" dirty="0" err="1">
                 <a:solidFill>
                   <a:srgbClr val="4864AA"/>
                 </a:solidFill>
@@ -24751,7 +24790,7 @@
               </a:rPr>
               <a:t>rsi</a:t>
             </a:r>
-            <a:endParaRPr lang="en-US" sz="1400" b="0">
+            <a:endParaRPr lang="en-US" sz="1400" b="0" dirty="0">
               <a:solidFill>
                 <a:srgbClr val="000000"/>
               </a:solidFill>
@@ -24763,7 +24802,7 @@
               <a:defRPr/>
             </a:pPr>
             <a:r>
-              <a:rPr lang="en-US" sz="1400" b="0">
+              <a:rPr lang="en-US" sz="1400" b="0" dirty="0">
                 <a:solidFill>
                   <a:srgbClr val="000000"/>
                 </a:solidFill>
@@ -24772,7 +24811,7 @@
               <a:t>        </a:t>
             </a:r>
             <a:r>
-              <a:rPr lang="en-US" sz="1400" b="0">
+              <a:rPr lang="en-US" sz="1400" b="0" dirty="0">
                 <a:solidFill>
                   <a:srgbClr val="0000FF"/>
                 </a:solidFill>
@@ -24781,7 +24820,7 @@
               <a:t>call</a:t>
             </a:r>
             <a:r>
-              <a:rPr lang="en-US" sz="1400" b="0">
+              <a:rPr lang="en-US" sz="1400" b="0" dirty="0">
                 <a:solidFill>
                   <a:srgbClr val="000000"/>
                 </a:solidFill>
@@ -24790,7 +24829,7 @@
               <a:t>    </a:t>
             </a:r>
             <a:r>
-              <a:rPr lang="en-US" sz="1400" b="0">
+              <a:rPr lang="en-US" sz="1400" b="0" dirty="0">
                 <a:solidFill>
                   <a:srgbClr val="008080"/>
                 </a:solidFill>
@@ -24799,7 +24838,7 @@
               <a:t>C</a:t>
             </a:r>
             <a:r>
-              <a:rPr lang="en-US" sz="1400" b="0">
+              <a:rPr lang="en-US" sz="1400" b="0" dirty="0">
                 <a:solidFill>
                   <a:srgbClr val="000000"/>
                 </a:solidFill>
@@ -24808,7 +24847,7 @@
               <a:t>::</a:t>
             </a:r>
             <a:r>
-              <a:rPr lang="en-US" sz="1400" b="0">
+              <a:rPr lang="en-US" sz="1400" b="0" dirty="0">
                 <a:solidFill>
                   <a:srgbClr val="008080"/>
                 </a:solidFill>
@@ -24817,7 +24856,7 @@
               <a:t>C</a:t>
             </a:r>
             <a:r>
-              <a:rPr lang="en-US" sz="1400" b="0">
+              <a:rPr lang="en-US" sz="1400" b="0" dirty="0">
                 <a:solidFill>
                   <a:srgbClr val="000000"/>
                 </a:solidFill>
@@ -24825,14 +24864,14 @@
               </a:rPr>
               <a:t>()</a:t>
             </a:r>
-            <a:endParaRPr/>
-          </a:p>
-          <a:p>
-            <a:pPr>
-              <a:defRPr/>
-            </a:pPr>
-            <a:r>
-              <a:rPr lang="en-US" sz="1400" b="0">
+            <a:endParaRPr dirty="0"/>
+          </a:p>
+          <a:p>
+            <a:pPr>
+              <a:defRPr/>
+            </a:pPr>
+            <a:r>
+              <a:rPr lang="en-US" sz="1400" b="0" dirty="0">
                 <a:solidFill>
                   <a:srgbClr val="000000"/>
                 </a:solidFill>
@@ -24841,7 +24880,7 @@
               <a:t>        </a:t>
             </a:r>
             <a:r>
-              <a:rPr lang="en-US" sz="1400" b="0">
+              <a:rPr lang="en-US" sz="1400" b="0" dirty="0">
                 <a:solidFill>
                   <a:srgbClr val="0000FF"/>
                 </a:solidFill>
@@ -24850,7 +24889,7 @@
               <a:t>add</a:t>
             </a:r>
             <a:r>
-              <a:rPr lang="en-US" sz="1400" b="0">
+              <a:rPr lang="en-US" sz="1400" b="0" dirty="0">
                 <a:solidFill>
                   <a:srgbClr val="000000"/>
                 </a:solidFill>
@@ -24859,7 +24898,7 @@
               <a:t>     </a:t>
             </a:r>
             <a:r>
-              <a:rPr lang="en-US" sz="1400" b="0">
+              <a:rPr lang="en-US" sz="1400" b="0" dirty="0" err="1">
                 <a:solidFill>
                   <a:srgbClr val="4864AA"/>
                 </a:solidFill>
@@ -24868,7 +24907,7 @@
               <a:t>rsi</a:t>
             </a:r>
             <a:r>
-              <a:rPr lang="en-US" sz="1400" b="0">
+              <a:rPr lang="en-US" sz="1400" b="0" dirty="0">
                 <a:solidFill>
                   <a:srgbClr val="000000"/>
                 </a:solidFill>
@@ -24877,7 +24916,7 @@
               <a:t>, </a:t>
             </a:r>
             <a:r>
-              <a:rPr lang="en-US" sz="1400" b="0">
+              <a:rPr lang="en-US" sz="1400" b="0" dirty="0">
                 <a:solidFill>
                   <a:srgbClr val="098658"/>
                 </a:solidFill>
@@ -24885,7 +24924,7 @@
               </a:rPr>
               <a:t>4</a:t>
             </a:r>
-            <a:endParaRPr lang="en-US" sz="1400" b="0">
+            <a:endParaRPr lang="en-US" sz="1400" b="0" dirty="0">
               <a:solidFill>
                 <a:srgbClr val="000000"/>
               </a:solidFill>
@@ -24897,7 +24936,7 @@
               <a:defRPr/>
             </a:pPr>
             <a:r>
-              <a:rPr lang="en-US" sz="1400" b="0">
+              <a:rPr lang="en-US" sz="1400" b="0" dirty="0">
                 <a:solidFill>
                   <a:srgbClr val="000000"/>
                 </a:solidFill>
@@ -24906,7 +24945,7 @@
               <a:t>        </a:t>
             </a:r>
             <a:r>
-              <a:rPr lang="en-US" sz="1400" b="0">
+              <a:rPr lang="en-US" sz="1400" b="0" dirty="0">
                 <a:solidFill>
                   <a:srgbClr val="0000FF"/>
                 </a:solidFill>
@@ -24915,7 +24954,7 @@
               <a:t>sub</a:t>
             </a:r>
             <a:r>
-              <a:rPr lang="en-US" sz="1400" b="0">
+              <a:rPr lang="en-US" sz="1400" b="0" dirty="0">
                 <a:solidFill>
                   <a:srgbClr val="000000"/>
                 </a:solidFill>
@@ -24924,7 +24963,7 @@
               <a:t>     </a:t>
             </a:r>
             <a:r>
-              <a:rPr lang="en-US" sz="1400" b="0">
+              <a:rPr lang="en-US" sz="1400" b="0" dirty="0" err="1">
                 <a:solidFill>
                   <a:srgbClr val="4864AA"/>
                 </a:solidFill>
@@ -24933,7 +24972,7 @@
               <a:t>rbx</a:t>
             </a:r>
             <a:r>
-              <a:rPr lang="en-US" sz="1400" b="0">
+              <a:rPr lang="en-US" sz="1400" b="0" dirty="0">
                 <a:solidFill>
                   <a:srgbClr val="000000"/>
                 </a:solidFill>
@@ -24942,7 +24981,7 @@
               <a:t>, </a:t>
             </a:r>
             <a:r>
-              <a:rPr lang="en-US" sz="1400" b="0">
+              <a:rPr lang="en-US" sz="1400" b="0" dirty="0">
                 <a:solidFill>
                   <a:srgbClr val="098658"/>
                 </a:solidFill>
@@ -24950,7 +24989,7 @@
               </a:rPr>
               <a:t>1</a:t>
             </a:r>
-            <a:endParaRPr lang="en-US" sz="1400" b="0">
+            <a:endParaRPr lang="en-US" sz="1400" b="0" dirty="0">
               <a:solidFill>
                 <a:srgbClr val="000000"/>
               </a:solidFill>
@@ -24962,7 +25001,7 @@
               <a:defRPr/>
             </a:pPr>
             <a:r>
-              <a:rPr lang="en-US" sz="1400" b="0">
+              <a:rPr lang="en-US" sz="1400" b="0" dirty="0">
                 <a:solidFill>
                   <a:srgbClr val="000000"/>
                 </a:solidFill>
@@ -24971,7 +25010,7 @@
               <a:t>        </a:t>
             </a:r>
             <a:r>
-              <a:rPr lang="en-US" sz="1400" b="0">
+              <a:rPr lang="en-US" sz="1400" b="0" dirty="0" err="1">
                 <a:solidFill>
                   <a:srgbClr val="0000FF"/>
                 </a:solidFill>
@@ -24980,7 +25019,7 @@
               <a:t>jns</a:t>
             </a:r>
             <a:r>
-              <a:rPr lang="en-US" sz="1400" b="0">
+              <a:rPr lang="en-US" sz="1400" b="0" dirty="0">
                 <a:solidFill>
                   <a:srgbClr val="000000"/>
                 </a:solidFill>
@@ -24989,7 +25028,7 @@
               <a:t>     </a:t>
             </a:r>
             <a:r>
-              <a:rPr lang="en-US" sz="1400" b="0">
+              <a:rPr lang="en-US" sz="1400" b="0" dirty="0">
                 <a:solidFill>
                   <a:srgbClr val="008080"/>
                 </a:solidFill>
@@ -24997,7 +25036,7 @@
               </a:rPr>
               <a:t>.L11</a:t>
             </a:r>
-            <a:endParaRPr lang="en-US" sz="1400" b="0">
+            <a:endParaRPr lang="en-US" sz="1400" b="0" dirty="0">
               <a:solidFill>
                 <a:srgbClr val="000000"/>
               </a:solidFill>
@@ -25009,7 +25048,7 @@
               <a:defRPr/>
             </a:pPr>
             <a:r>
-              <a:rPr lang="en-US" sz="1400" b="0">
+              <a:rPr lang="en-US" sz="1400" b="0" dirty="0">
                 <a:solidFill>
                   <a:srgbClr val="008080"/>
                 </a:solidFill>
@@ -25018,7 +25057,7 @@
               <a:t>.L9: </a:t>
             </a:r>
             <a:r>
-              <a:rPr lang="en-US" sz="1400" b="0">
+              <a:rPr lang="en-US" sz="1400" b="0" dirty="0">
                 <a:solidFill>
                   <a:srgbClr val="000000"/>
                 </a:solidFill>
@@ -25027,7 +25066,7 @@
               <a:t>   </a:t>
             </a:r>
             <a:r>
-              <a:rPr lang="en-US" sz="1400" b="0">
+              <a:rPr lang="en-US" sz="1400" b="0" dirty="0">
                 <a:solidFill>
                   <a:srgbClr val="0000FF"/>
                 </a:solidFill>
@@ -25036,7 +25075,7 @@
               <a:t>mov</a:t>
             </a:r>
             <a:r>
-              <a:rPr lang="en-US" sz="1400" b="0">
+              <a:rPr lang="en-US" sz="1400" b="0" dirty="0">
                 <a:solidFill>
                   <a:srgbClr val="000000"/>
                 </a:solidFill>
@@ -25045,7 +25084,7 @@
               <a:t>     </a:t>
             </a:r>
             <a:r>
-              <a:rPr lang="en-US" sz="1400" b="0">
+              <a:rPr lang="en-US" sz="1400" b="0" dirty="0" err="1">
                 <a:solidFill>
                   <a:srgbClr val="4864AA"/>
                 </a:solidFill>
@@ -25054,7 +25093,7 @@
               <a:t>rax</a:t>
             </a:r>
             <a:r>
-              <a:rPr lang="en-US" sz="1400" b="0">
+              <a:rPr lang="en-US" sz="1400" b="0" dirty="0">
                 <a:solidFill>
                   <a:srgbClr val="000000"/>
                 </a:solidFill>
@@ -25063,7 +25102,7 @@
               <a:t>, </a:t>
             </a:r>
             <a:r>
-              <a:rPr lang="en-US" sz="1400" b="0">
+              <a:rPr lang="en-US" sz="1400" b="0" dirty="0" err="1">
                 <a:solidFill>
                   <a:srgbClr val="4864AA"/>
                 </a:solidFill>
@@ -25071,7 +25110,7 @@
               </a:rPr>
               <a:t>rdi</a:t>
             </a:r>
-            <a:endParaRPr lang="en-US" sz="1400" b="0">
+            <a:endParaRPr lang="en-US" sz="1400" b="0" dirty="0">
               <a:solidFill>
                 <a:srgbClr val="000000"/>
               </a:solidFill>
@@ -25083,7 +25122,7 @@
               <a:defRPr/>
             </a:pPr>
             <a:r>
-              <a:rPr lang="en-US" sz="1400" b="0">
+              <a:rPr lang="en-US" sz="1400" b="0" dirty="0">
                 <a:solidFill>
                   <a:srgbClr val="000000"/>
                 </a:solidFill>
@@ -25092,7 +25131,7 @@
               <a:t>        </a:t>
             </a:r>
             <a:r>
-              <a:rPr lang="en-US" sz="1400" b="0">
+              <a:rPr lang="en-US" sz="1400" b="0" dirty="0">
                 <a:solidFill>
                   <a:srgbClr val="0000FF"/>
                 </a:solidFill>
@@ -25101,7 +25140,7 @@
               <a:t>add</a:t>
             </a:r>
             <a:r>
-              <a:rPr lang="en-US" sz="1400" b="0">
+              <a:rPr lang="en-US" sz="1400" b="0" dirty="0">
                 <a:solidFill>
                   <a:srgbClr val="000000"/>
                 </a:solidFill>
@@ -25110,7 +25149,7 @@
               <a:t>     </a:t>
             </a:r>
             <a:r>
-              <a:rPr lang="en-US" sz="1400" b="0">
+              <a:rPr lang="en-US" sz="1400" b="0" dirty="0" err="1">
                 <a:solidFill>
                   <a:srgbClr val="4864AA"/>
                 </a:solidFill>
@@ -25119,7 +25158,7 @@
               <a:t>rsp</a:t>
             </a:r>
             <a:r>
-              <a:rPr lang="en-US" sz="1400" b="0">
+              <a:rPr lang="en-US" sz="1400" b="0" dirty="0">
                 <a:solidFill>
                   <a:srgbClr val="000000"/>
                 </a:solidFill>
@@ -25128,7 +25167,7 @@
               <a:t>, </a:t>
             </a:r>
             <a:r>
-              <a:rPr lang="en-US" sz="1400" b="0">
+              <a:rPr lang="en-US" sz="1400" b="0" dirty="0">
                 <a:solidFill>
                   <a:srgbClr val="098658"/>
                 </a:solidFill>
@@ -25136,7 +25175,7 @@
               </a:rPr>
               <a:t>32 ; EPILOGUE START</a:t>
             </a:r>
-            <a:endParaRPr lang="en-US" sz="1400" b="0">
+            <a:endParaRPr lang="en-US" sz="1400" b="0" dirty="0">
               <a:solidFill>
                 <a:srgbClr val="000000"/>
               </a:solidFill>
@@ -25148,7 +25187,7 @@
               <a:defRPr/>
             </a:pPr>
             <a:r>
-              <a:rPr lang="en-US" sz="1400" b="0">
+              <a:rPr lang="en-US" sz="1400" b="0" dirty="0">
                 <a:solidFill>
                   <a:srgbClr val="000000"/>
                 </a:solidFill>
@@ -25157,7 +25196,7 @@
               <a:t>        </a:t>
             </a:r>
             <a:r>
-              <a:rPr lang="en-US" sz="1400" b="0">
+              <a:rPr lang="en-US" sz="1400" b="0" dirty="0">
                 <a:solidFill>
                   <a:srgbClr val="0000FF"/>
                 </a:solidFill>
@@ -25166,7 +25205,7 @@
               <a:t>pop</a:t>
             </a:r>
             <a:r>
-              <a:rPr lang="en-US" sz="1400" b="0">
+              <a:rPr lang="en-US" sz="1400" b="0" dirty="0">
                 <a:solidFill>
                   <a:srgbClr val="000000"/>
                 </a:solidFill>
@@ -25175,7 +25214,7 @@
               <a:t>     </a:t>
             </a:r>
             <a:r>
-              <a:rPr lang="en-US" sz="1400" b="0">
+              <a:rPr lang="en-US" sz="1400" b="0" dirty="0" err="1">
                 <a:solidFill>
                   <a:srgbClr val="4864AA"/>
                 </a:solidFill>
@@ -25183,7 +25222,7 @@
               </a:rPr>
               <a:t>rbx</a:t>
             </a:r>
-            <a:endParaRPr lang="en-US" sz="1400" b="0">
+            <a:endParaRPr lang="en-US" sz="1400" b="0" dirty="0">
               <a:solidFill>
                 <a:srgbClr val="000000"/>
               </a:solidFill>
@@ -25195,7 +25234,7 @@
               <a:defRPr/>
             </a:pPr>
             <a:r>
-              <a:rPr lang="en-US" sz="1400" b="0">
+              <a:rPr lang="en-US" sz="1400" b="0" dirty="0">
                 <a:solidFill>
                   <a:srgbClr val="000000"/>
                 </a:solidFill>
@@ -25204,7 +25243,7 @@
               <a:t>        </a:t>
             </a:r>
             <a:r>
-              <a:rPr lang="en-US" sz="1400" b="0">
+              <a:rPr lang="en-US" sz="1400" b="0" dirty="0">
                 <a:solidFill>
                   <a:srgbClr val="0000FF"/>
                 </a:solidFill>
@@ -25213,7 +25252,7 @@
               <a:t>pop</a:t>
             </a:r>
             <a:r>
-              <a:rPr lang="en-US" sz="1400" b="0">
+              <a:rPr lang="en-US" sz="1400" b="0" dirty="0">
                 <a:solidFill>
                   <a:srgbClr val="000000"/>
                 </a:solidFill>
@@ -25222,7 +25261,7 @@
               <a:t>     </a:t>
             </a:r>
             <a:r>
-              <a:rPr lang="en-US" sz="1400" b="0">
+              <a:rPr lang="en-US" sz="1400" b="0" dirty="0" err="1">
                 <a:solidFill>
                   <a:srgbClr val="4864AA"/>
                 </a:solidFill>
@@ -25230,7 +25269,7 @@
               </a:rPr>
               <a:t>rsi</a:t>
             </a:r>
-            <a:endParaRPr lang="en-US" sz="1400" b="0">
+            <a:endParaRPr lang="en-US" sz="1400" b="0" dirty="0">
               <a:solidFill>
                 <a:srgbClr val="000000"/>
               </a:solidFill>
@@ -25242,7 +25281,7 @@
               <a:defRPr/>
             </a:pPr>
             <a:r>
-              <a:rPr lang="en-US" sz="1400" b="0">
+              <a:rPr lang="en-US" sz="1400" b="0" dirty="0">
                 <a:solidFill>
                   <a:srgbClr val="000000"/>
                 </a:solidFill>
@@ -25251,7 +25290,7 @@
               <a:t>        </a:t>
             </a:r>
             <a:r>
-              <a:rPr lang="en-US" sz="1400" b="0">
+              <a:rPr lang="en-US" sz="1400" b="0" dirty="0">
                 <a:solidFill>
                   <a:srgbClr val="0000FF"/>
                 </a:solidFill>
@@ -25260,7 +25299,7 @@
               <a:t>pop</a:t>
             </a:r>
             <a:r>
-              <a:rPr lang="en-US" sz="1400" b="0">
+              <a:rPr lang="en-US" sz="1400" b="0" dirty="0">
                 <a:solidFill>
                   <a:srgbClr val="000000"/>
                 </a:solidFill>
@@ -25269,7 +25308,7 @@
               <a:t>     </a:t>
             </a:r>
             <a:r>
-              <a:rPr lang="en-US" sz="1400" b="0">
+              <a:rPr lang="en-US" sz="1400" b="0" dirty="0" err="1">
                 <a:solidFill>
                   <a:srgbClr val="4864AA"/>
                 </a:solidFill>
@@ -25277,7 +25316,7 @@
               </a:rPr>
               <a:t>rdi</a:t>
             </a:r>
-            <a:endParaRPr lang="en-US" sz="1400" b="0">
+            <a:endParaRPr lang="en-US" sz="1400" b="0" dirty="0">
               <a:solidFill>
                 <a:srgbClr val="000000"/>
               </a:solidFill>
@@ -25289,7 +25328,7 @@
               <a:defRPr/>
             </a:pPr>
             <a:r>
-              <a:rPr lang="en-US" sz="1400" b="0">
+              <a:rPr lang="en-US" sz="1400" b="0" dirty="0">
                 <a:solidFill>
                   <a:srgbClr val="000000"/>
                 </a:solidFill>
@@ -25298,7 +25337,7 @@
               <a:t>        </a:t>
             </a:r>
             <a:r>
-              <a:rPr lang="en-US" sz="1400" b="0">
+              <a:rPr lang="en-US" sz="1400" b="0" dirty="0">
                 <a:solidFill>
                   <a:srgbClr val="0000FF"/>
                 </a:solidFill>
@@ -25306,7 +25345,7 @@
               </a:rPr>
               <a:t>ret</a:t>
             </a:r>
-            <a:endParaRPr lang="en-US" sz="1400" b="0">
+            <a:endParaRPr lang="en-US" sz="1400" b="0" dirty="0">
               <a:solidFill>
                 <a:srgbClr val="000000"/>
               </a:solidFill>
@@ -25529,64 +25568,64 @@
               <a:defRPr/>
             </a:pPr>
             <a:r>
-              <a:rPr lang="ru-RU"/>
+              <a:rPr lang="ru-RU" dirty="0"/>
               <a:t>Оператор </a:t>
             </a:r>
             <a:r>
-              <a:rPr lang="en-US"/>
+              <a:rPr lang="en-US" dirty="0"/>
               <a:t>new[] </a:t>
             </a:r>
             <a:r>
-              <a:rPr lang="ru-RU"/>
+              <a:rPr lang="ru-RU" dirty="0"/>
               <a:t>сводится к выделению буфера достаточного объема, </a:t>
             </a:r>
             <a:r>
-              <a:rPr lang="ru-RU" i="1"/>
+              <a:rPr lang="ru-RU" i="1" dirty="0"/>
               <a:t>записи количества объектов в начало буфера </a:t>
             </a:r>
             <a:r>
-              <a:rPr lang="ru-RU"/>
+              <a:rPr lang="ru-RU" dirty="0"/>
               <a:t>и вызову конструктора для каждого из объектов массива. </a:t>
             </a:r>
-            <a:endParaRPr/>
-          </a:p>
-          <a:p>
-            <a:pPr>
-              <a:defRPr/>
-            </a:pPr>
-            <a:endParaRPr lang="ru-RU"/>
-          </a:p>
-          <a:p>
-            <a:pPr>
-              <a:defRPr/>
-            </a:pPr>
-            <a:r>
-              <a:rPr lang="ru-RU"/>
+            <a:endParaRPr dirty="0"/>
+          </a:p>
+          <a:p>
+            <a:pPr>
+              <a:defRPr/>
+            </a:pPr>
+            <a:endParaRPr lang="ru-RU" dirty="0"/>
+          </a:p>
+          <a:p>
+            <a:pPr>
+              <a:defRPr/>
+            </a:pPr>
+            <a:r>
+              <a:rPr lang="ru-RU" dirty="0"/>
               <a:t>При этом адрес, возвращаемый </a:t>
             </a:r>
             <a:r>
-              <a:rPr lang="en-US"/>
+              <a:rPr lang="en-US" dirty="0"/>
               <a:t>new[]</a:t>
             </a:r>
             <a:r>
-              <a:rPr lang="ru-RU"/>
+              <a:rPr lang="ru-RU" dirty="0"/>
               <a:t>, подбирается так, что значение (адрес + 8) выровнено по 16 байтам </a:t>
             </a:r>
             <a:r>
-              <a:rPr lang="en-US"/>
+              <a:rPr lang="en-US" dirty="0"/>
               <a:t>-&gt; </a:t>
             </a:r>
             <a:r>
-              <a:rPr lang="ru-RU"/>
+              <a:rPr lang="ru-RU" dirty="0"/>
               <a:t>область с объектами выровнена по 16 байтам.</a:t>
             </a:r>
-            <a:endParaRPr/>
-          </a:p>
-          <a:p>
-            <a:pPr>
-              <a:defRPr/>
-            </a:pPr>
-            <a:endParaRPr lang="ru-RU"/>
+            <a:endParaRPr dirty="0"/>
+          </a:p>
+          <a:p>
+            <a:pPr>
+              <a:defRPr/>
+            </a:pPr>
+            <a:endParaRPr lang="ru-RU" dirty="0"/>
           </a:p>
         </p:txBody>
       </p:sp>
@@ -25616,12 +25655,12 @@
               <a:defRPr/>
             </a:pPr>
             <a:r>
-              <a:rPr lang="en-US" u="sng">
+              <a:rPr lang="en-US" u="sng" dirty="0">
                 <a:hlinkClick r:id="rId3"/>
               </a:rPr>
               <a:t>https://godbolt.org/z/6cWroda4n</a:t>
             </a:r>
-            <a:endParaRPr lang="ru-RU"/>
+            <a:endParaRPr lang="ru-RU" dirty="0"/>
           </a:p>
         </p:txBody>
       </p:sp>
@@ -25696,6 +25735,262 @@
           </a:fontRef>
         </p:style>
       </p:cxnSp>
+      <p:sp>
+        <p:nvSpPr>
+          <p:cNvPr id="2" name="Rectangle 1">
+            <a:extLst>
+              <a:ext uri="{FF2B5EF4-FFF2-40B4-BE49-F238E27FC236}">
+                <a16:creationId xmlns:a16="http://schemas.microsoft.com/office/drawing/2014/main" id="{38A14A3D-F5EA-A6D1-C0ED-EE498965CD01}"/>
+              </a:ext>
+            </a:extLst>
+          </p:cNvPr>
+          <p:cNvSpPr/>
+          <p:nvPr/>
+        </p:nvSpPr>
+        <p:spPr>
+          <a:xfrm>
+            <a:off x="415122" y="6084780"/>
+            <a:ext cx="779509" cy="540000"/>
+          </a:xfrm>
+          <a:prstGeom prst="rect">
+            <a:avLst/>
+          </a:prstGeom>
+          <a:solidFill>
+            <a:schemeClr val="accent5">
+              <a:lumMod val="60000"/>
+              <a:lumOff val="40000"/>
+            </a:schemeClr>
+          </a:solidFill>
+        </p:spPr>
+        <p:style>
+          <a:lnRef idx="2">
+            <a:schemeClr val="accent1">
+              <a:shade val="15000"/>
+            </a:schemeClr>
+          </a:lnRef>
+          <a:fillRef idx="1">
+            <a:schemeClr val="accent1"/>
+          </a:fillRef>
+          <a:effectRef idx="0">
+            <a:schemeClr val="accent1"/>
+          </a:effectRef>
+          <a:fontRef idx="minor">
+            <a:schemeClr val="lt1"/>
+          </a:fontRef>
+        </p:style>
+        <p:txBody>
+          <a:bodyPr rtlCol="0" anchor="ctr"/>
+          <a:lstStyle/>
+          <a:p>
+            <a:pPr algn="ctr"/>
+            <a:r>
+              <a:rPr lang="en-US" dirty="0"/>
+              <a:t>count</a:t>
+            </a:r>
+            <a:endParaRPr lang="ru-RU" dirty="0"/>
+          </a:p>
+        </p:txBody>
+      </p:sp>
+      <p:sp>
+        <p:nvSpPr>
+          <p:cNvPr id="4" name="Rectangle 3">
+            <a:extLst>
+              <a:ext uri="{FF2B5EF4-FFF2-40B4-BE49-F238E27FC236}">
+                <a16:creationId xmlns:a16="http://schemas.microsoft.com/office/drawing/2014/main" id="{ED451CB0-5E76-CA1D-BBCE-62ACEA15301F}"/>
+              </a:ext>
+            </a:extLst>
+          </p:cNvPr>
+          <p:cNvSpPr/>
+          <p:nvPr/>
+        </p:nvSpPr>
+        <p:spPr bwMode="auto">
+          <a:xfrm>
+            <a:off x="1194631" y="6084780"/>
+            <a:ext cx="1080000" cy="540000"/>
+          </a:xfrm>
+          <a:prstGeom prst="rect">
+            <a:avLst/>
+          </a:prstGeom>
+        </p:spPr>
+        <p:style>
+          <a:lnRef idx="2">
+            <a:schemeClr val="accent1">
+              <a:shade val="15000"/>
+            </a:schemeClr>
+          </a:lnRef>
+          <a:fillRef idx="1">
+            <a:schemeClr val="accent1"/>
+          </a:fillRef>
+          <a:effectRef idx="0">
+            <a:schemeClr val="accent1"/>
+          </a:effectRef>
+          <a:fontRef idx="minor">
+            <a:schemeClr val="lt1"/>
+          </a:fontRef>
+        </p:style>
+        <p:txBody>
+          <a:bodyPr rtlCol="0" anchor="ctr"/>
+          <a:lstStyle/>
+          <a:p>
+            <a:pPr algn="ctr"/>
+            <a:r>
+              <a:rPr lang="en-US" dirty="0"/>
+              <a:t>object</a:t>
+            </a:r>
+            <a:endParaRPr lang="ru-RU" dirty="0"/>
+          </a:p>
+        </p:txBody>
+      </p:sp>
+      <p:sp>
+        <p:nvSpPr>
+          <p:cNvPr id="5" name="Rectangle 4">
+            <a:extLst>
+              <a:ext uri="{FF2B5EF4-FFF2-40B4-BE49-F238E27FC236}">
+                <a16:creationId xmlns:a16="http://schemas.microsoft.com/office/drawing/2014/main" id="{E7F36CB0-68B5-C54A-72CF-F7A4CE9876DF}"/>
+              </a:ext>
+            </a:extLst>
+          </p:cNvPr>
+          <p:cNvSpPr/>
+          <p:nvPr/>
+        </p:nvSpPr>
+        <p:spPr bwMode="auto">
+          <a:xfrm>
+            <a:off x="2274631" y="6083277"/>
+            <a:ext cx="1080000" cy="540000"/>
+          </a:xfrm>
+          <a:prstGeom prst="rect">
+            <a:avLst/>
+          </a:prstGeom>
+        </p:spPr>
+        <p:style>
+          <a:lnRef idx="2">
+            <a:schemeClr val="accent1">
+              <a:shade val="15000"/>
+            </a:schemeClr>
+          </a:lnRef>
+          <a:fillRef idx="1">
+            <a:schemeClr val="accent1"/>
+          </a:fillRef>
+          <a:effectRef idx="0">
+            <a:schemeClr val="accent1"/>
+          </a:effectRef>
+          <a:fontRef idx="minor">
+            <a:schemeClr val="lt1"/>
+          </a:fontRef>
+        </p:style>
+        <p:txBody>
+          <a:bodyPr rtlCol="0" anchor="ctr"/>
+          <a:lstStyle/>
+          <a:p>
+            <a:pPr algn="ctr"/>
+            <a:r>
+              <a:rPr lang="en-US" dirty="0"/>
+              <a:t>object</a:t>
+            </a:r>
+            <a:endParaRPr lang="ru-RU" dirty="0"/>
+          </a:p>
+        </p:txBody>
+      </p:sp>
+      <p:sp>
+        <p:nvSpPr>
+          <p:cNvPr id="6" name="Rectangle 5">
+            <a:extLst>
+              <a:ext uri="{FF2B5EF4-FFF2-40B4-BE49-F238E27FC236}">
+                <a16:creationId xmlns:a16="http://schemas.microsoft.com/office/drawing/2014/main" id="{BB0F30AB-566C-D6C2-E74A-7FAD4BC76AED}"/>
+              </a:ext>
+            </a:extLst>
+          </p:cNvPr>
+          <p:cNvSpPr/>
+          <p:nvPr/>
+        </p:nvSpPr>
+        <p:spPr bwMode="auto">
+          <a:xfrm>
+            <a:off x="3354631" y="6083277"/>
+            <a:ext cx="1080000" cy="540000"/>
+          </a:xfrm>
+          <a:prstGeom prst="rect">
+            <a:avLst/>
+          </a:prstGeom>
+        </p:spPr>
+        <p:style>
+          <a:lnRef idx="2">
+            <a:schemeClr val="accent1">
+              <a:shade val="15000"/>
+            </a:schemeClr>
+          </a:lnRef>
+          <a:fillRef idx="1">
+            <a:schemeClr val="accent1"/>
+          </a:fillRef>
+          <a:effectRef idx="0">
+            <a:schemeClr val="accent1"/>
+          </a:effectRef>
+          <a:fontRef idx="minor">
+            <a:schemeClr val="lt1"/>
+          </a:fontRef>
+        </p:style>
+        <p:txBody>
+          <a:bodyPr rtlCol="0" anchor="ctr"/>
+          <a:lstStyle/>
+          <a:p>
+            <a:pPr algn="ctr"/>
+            <a:r>
+              <a:rPr lang="en-US" dirty="0"/>
+              <a:t>object</a:t>
+            </a:r>
+            <a:endParaRPr lang="ru-RU" dirty="0"/>
+          </a:p>
+        </p:txBody>
+      </p:sp>
+      <p:sp>
+        <p:nvSpPr>
+          <p:cNvPr id="7" name="Rectangle 6">
+            <a:extLst>
+              <a:ext uri="{FF2B5EF4-FFF2-40B4-BE49-F238E27FC236}">
+                <a16:creationId xmlns:a16="http://schemas.microsoft.com/office/drawing/2014/main" id="{5AEA94D7-FC57-7186-1000-A28A9D89142B}"/>
+              </a:ext>
+            </a:extLst>
+          </p:cNvPr>
+          <p:cNvSpPr/>
+          <p:nvPr/>
+        </p:nvSpPr>
+        <p:spPr bwMode="auto">
+          <a:xfrm>
+            <a:off x="4434631" y="6083277"/>
+            <a:ext cx="1080000" cy="540000"/>
+          </a:xfrm>
+          <a:prstGeom prst="rect">
+            <a:avLst/>
+          </a:prstGeom>
+        </p:spPr>
+        <p:style>
+          <a:lnRef idx="2">
+            <a:schemeClr val="accent1">
+              <a:shade val="15000"/>
+            </a:schemeClr>
+          </a:lnRef>
+          <a:fillRef idx="1">
+            <a:schemeClr val="accent1"/>
+          </a:fillRef>
+          <a:effectRef idx="0">
+            <a:schemeClr val="accent1"/>
+          </a:effectRef>
+          <a:fontRef idx="minor">
+            <a:schemeClr val="lt1"/>
+          </a:fontRef>
+        </p:style>
+        <p:txBody>
+          <a:bodyPr rtlCol="0" anchor="ctr"/>
+          <a:lstStyle/>
+          <a:p>
+            <a:pPr algn="ctr"/>
+            <a:r>
+              <a:rPr lang="en-US" dirty="0"/>
+              <a:t>…</a:t>
+            </a:r>
+            <a:endParaRPr lang="ru-RU" dirty="0"/>
+          </a:p>
+        </p:txBody>
+      </p:sp>
     </p:spTree>
   </p:cSld>
   <p:clrMapOvr>
@@ -27877,44 +28172,44 @@
               <a:defRPr/>
             </a:pPr>
             <a:r>
-              <a:rPr lang="ru-RU"/>
+              <a:rPr lang="ru-RU" dirty="0"/>
               <a:t>Оператор </a:t>
             </a:r>
             <a:r>
-              <a:rPr lang="en-US"/>
+              <a:rPr lang="en-US" dirty="0"/>
               <a:t>delete[] </a:t>
             </a:r>
             <a:r>
-              <a:rPr lang="ru-RU"/>
+              <a:rPr lang="ru-RU" dirty="0"/>
               <a:t>функционирует обратно оператору </a:t>
             </a:r>
             <a:r>
-              <a:rPr lang="en-US"/>
+              <a:rPr lang="en-US" dirty="0"/>
               <a:t>new[] </a:t>
             </a:r>
             <a:r>
-              <a:rPr lang="ru-RU"/>
+              <a:rPr lang="ru-RU" dirty="0"/>
               <a:t> (считывает количество элементов – вызывает деструкторы – удаляет буфер).</a:t>
             </a:r>
-            <a:endParaRPr/>
-          </a:p>
-          <a:p>
-            <a:pPr>
-              <a:defRPr/>
-            </a:pPr>
-            <a:endParaRPr lang="ru-RU"/>
-          </a:p>
-          <a:p>
-            <a:pPr>
-              <a:defRPr/>
-            </a:pPr>
-            <a:endParaRPr lang="ru-RU"/>
-          </a:p>
-          <a:p>
-            <a:pPr>
-              <a:defRPr/>
-            </a:pPr>
-            <a:endParaRPr lang="ru-RU"/>
+            <a:endParaRPr dirty="0"/>
+          </a:p>
+          <a:p>
+            <a:pPr>
+              <a:defRPr/>
+            </a:pPr>
+            <a:endParaRPr lang="ru-RU" dirty="0"/>
+          </a:p>
+          <a:p>
+            <a:pPr>
+              <a:defRPr/>
+            </a:pPr>
+            <a:endParaRPr lang="ru-RU" dirty="0"/>
+          </a:p>
+          <a:p>
+            <a:pPr>
+              <a:defRPr/>
+            </a:pPr>
+            <a:endParaRPr lang="ru-RU" dirty="0"/>
           </a:p>
         </p:txBody>
       </p:sp>
@@ -28127,6 +28422,262 @@
           </a:p>
         </p:txBody>
       </p:sp>
+      <p:sp>
+        <p:nvSpPr>
+          <p:cNvPr id="2" name="Rectangle 1">
+            <a:extLst>
+              <a:ext uri="{FF2B5EF4-FFF2-40B4-BE49-F238E27FC236}">
+                <a16:creationId xmlns:a16="http://schemas.microsoft.com/office/drawing/2014/main" id="{D8E40797-D4D2-19E9-FAF9-EE92ED0C9A9E}"/>
+              </a:ext>
+            </a:extLst>
+          </p:cNvPr>
+          <p:cNvSpPr/>
+          <p:nvPr/>
+        </p:nvSpPr>
+        <p:spPr bwMode="auto">
+          <a:xfrm>
+            <a:off x="415122" y="6084780"/>
+            <a:ext cx="779509" cy="540000"/>
+          </a:xfrm>
+          <a:prstGeom prst="rect">
+            <a:avLst/>
+          </a:prstGeom>
+          <a:solidFill>
+            <a:schemeClr val="accent5">
+              <a:lumMod val="60000"/>
+              <a:lumOff val="40000"/>
+            </a:schemeClr>
+          </a:solidFill>
+        </p:spPr>
+        <p:style>
+          <a:lnRef idx="2">
+            <a:schemeClr val="accent1">
+              <a:shade val="15000"/>
+            </a:schemeClr>
+          </a:lnRef>
+          <a:fillRef idx="1">
+            <a:schemeClr val="accent1"/>
+          </a:fillRef>
+          <a:effectRef idx="0">
+            <a:schemeClr val="accent1"/>
+          </a:effectRef>
+          <a:fontRef idx="minor">
+            <a:schemeClr val="lt1"/>
+          </a:fontRef>
+        </p:style>
+        <p:txBody>
+          <a:bodyPr rtlCol="0" anchor="ctr"/>
+          <a:lstStyle/>
+          <a:p>
+            <a:pPr algn="ctr"/>
+            <a:r>
+              <a:rPr lang="en-US" dirty="0"/>
+              <a:t>count</a:t>
+            </a:r>
+            <a:endParaRPr lang="ru-RU" dirty="0"/>
+          </a:p>
+        </p:txBody>
+      </p:sp>
+      <p:sp>
+        <p:nvSpPr>
+          <p:cNvPr id="3" name="Rectangle 2">
+            <a:extLst>
+              <a:ext uri="{FF2B5EF4-FFF2-40B4-BE49-F238E27FC236}">
+                <a16:creationId xmlns:a16="http://schemas.microsoft.com/office/drawing/2014/main" id="{CF9BE0AE-4021-58A4-64A2-882FB1BB3557}"/>
+              </a:ext>
+            </a:extLst>
+          </p:cNvPr>
+          <p:cNvSpPr/>
+          <p:nvPr/>
+        </p:nvSpPr>
+        <p:spPr bwMode="auto">
+          <a:xfrm>
+            <a:off x="1194631" y="6084780"/>
+            <a:ext cx="1080000" cy="540000"/>
+          </a:xfrm>
+          <a:prstGeom prst="rect">
+            <a:avLst/>
+          </a:prstGeom>
+        </p:spPr>
+        <p:style>
+          <a:lnRef idx="2">
+            <a:schemeClr val="accent1">
+              <a:shade val="15000"/>
+            </a:schemeClr>
+          </a:lnRef>
+          <a:fillRef idx="1">
+            <a:schemeClr val="accent1"/>
+          </a:fillRef>
+          <a:effectRef idx="0">
+            <a:schemeClr val="accent1"/>
+          </a:effectRef>
+          <a:fontRef idx="minor">
+            <a:schemeClr val="lt1"/>
+          </a:fontRef>
+        </p:style>
+        <p:txBody>
+          <a:bodyPr rtlCol="0" anchor="ctr"/>
+          <a:lstStyle/>
+          <a:p>
+            <a:pPr algn="ctr"/>
+            <a:r>
+              <a:rPr lang="en-US" dirty="0"/>
+              <a:t>object</a:t>
+            </a:r>
+            <a:endParaRPr lang="ru-RU" dirty="0"/>
+          </a:p>
+        </p:txBody>
+      </p:sp>
+      <p:sp>
+        <p:nvSpPr>
+          <p:cNvPr id="4" name="Rectangle 3">
+            <a:extLst>
+              <a:ext uri="{FF2B5EF4-FFF2-40B4-BE49-F238E27FC236}">
+                <a16:creationId xmlns:a16="http://schemas.microsoft.com/office/drawing/2014/main" id="{1A48C929-7AF2-1CB9-EFBE-48D3439EA76A}"/>
+              </a:ext>
+            </a:extLst>
+          </p:cNvPr>
+          <p:cNvSpPr/>
+          <p:nvPr/>
+        </p:nvSpPr>
+        <p:spPr bwMode="auto">
+          <a:xfrm>
+            <a:off x="2274631" y="6083277"/>
+            <a:ext cx="1080000" cy="540000"/>
+          </a:xfrm>
+          <a:prstGeom prst="rect">
+            <a:avLst/>
+          </a:prstGeom>
+        </p:spPr>
+        <p:style>
+          <a:lnRef idx="2">
+            <a:schemeClr val="accent1">
+              <a:shade val="15000"/>
+            </a:schemeClr>
+          </a:lnRef>
+          <a:fillRef idx="1">
+            <a:schemeClr val="accent1"/>
+          </a:fillRef>
+          <a:effectRef idx="0">
+            <a:schemeClr val="accent1"/>
+          </a:effectRef>
+          <a:fontRef idx="minor">
+            <a:schemeClr val="lt1"/>
+          </a:fontRef>
+        </p:style>
+        <p:txBody>
+          <a:bodyPr rtlCol="0" anchor="ctr"/>
+          <a:lstStyle/>
+          <a:p>
+            <a:pPr algn="ctr"/>
+            <a:r>
+              <a:rPr lang="en-US" dirty="0"/>
+              <a:t>object</a:t>
+            </a:r>
+            <a:endParaRPr lang="ru-RU" dirty="0"/>
+          </a:p>
+        </p:txBody>
+      </p:sp>
+      <p:sp>
+        <p:nvSpPr>
+          <p:cNvPr id="5" name="Rectangle 4">
+            <a:extLst>
+              <a:ext uri="{FF2B5EF4-FFF2-40B4-BE49-F238E27FC236}">
+                <a16:creationId xmlns:a16="http://schemas.microsoft.com/office/drawing/2014/main" id="{6647B56C-1C63-46C3-B3CF-29EF6E2C9970}"/>
+              </a:ext>
+            </a:extLst>
+          </p:cNvPr>
+          <p:cNvSpPr/>
+          <p:nvPr/>
+        </p:nvSpPr>
+        <p:spPr bwMode="auto">
+          <a:xfrm>
+            <a:off x="3354631" y="6083277"/>
+            <a:ext cx="1080000" cy="540000"/>
+          </a:xfrm>
+          <a:prstGeom prst="rect">
+            <a:avLst/>
+          </a:prstGeom>
+        </p:spPr>
+        <p:style>
+          <a:lnRef idx="2">
+            <a:schemeClr val="accent1">
+              <a:shade val="15000"/>
+            </a:schemeClr>
+          </a:lnRef>
+          <a:fillRef idx="1">
+            <a:schemeClr val="accent1"/>
+          </a:fillRef>
+          <a:effectRef idx="0">
+            <a:schemeClr val="accent1"/>
+          </a:effectRef>
+          <a:fontRef idx="minor">
+            <a:schemeClr val="lt1"/>
+          </a:fontRef>
+        </p:style>
+        <p:txBody>
+          <a:bodyPr rtlCol="0" anchor="ctr"/>
+          <a:lstStyle/>
+          <a:p>
+            <a:pPr algn="ctr"/>
+            <a:r>
+              <a:rPr lang="en-US" dirty="0"/>
+              <a:t>object</a:t>
+            </a:r>
+            <a:endParaRPr lang="ru-RU" dirty="0"/>
+          </a:p>
+        </p:txBody>
+      </p:sp>
+      <p:sp>
+        <p:nvSpPr>
+          <p:cNvPr id="6" name="Rectangle 5">
+            <a:extLst>
+              <a:ext uri="{FF2B5EF4-FFF2-40B4-BE49-F238E27FC236}">
+                <a16:creationId xmlns:a16="http://schemas.microsoft.com/office/drawing/2014/main" id="{9C5696A4-4AA3-C090-916F-02C698D45095}"/>
+              </a:ext>
+            </a:extLst>
+          </p:cNvPr>
+          <p:cNvSpPr/>
+          <p:nvPr/>
+        </p:nvSpPr>
+        <p:spPr bwMode="auto">
+          <a:xfrm>
+            <a:off x="4434631" y="6083277"/>
+            <a:ext cx="1080000" cy="540000"/>
+          </a:xfrm>
+          <a:prstGeom prst="rect">
+            <a:avLst/>
+          </a:prstGeom>
+        </p:spPr>
+        <p:style>
+          <a:lnRef idx="2">
+            <a:schemeClr val="accent1">
+              <a:shade val="15000"/>
+            </a:schemeClr>
+          </a:lnRef>
+          <a:fillRef idx="1">
+            <a:schemeClr val="accent1"/>
+          </a:fillRef>
+          <a:effectRef idx="0">
+            <a:schemeClr val="accent1"/>
+          </a:effectRef>
+          <a:fontRef idx="minor">
+            <a:schemeClr val="lt1"/>
+          </a:fontRef>
+        </p:style>
+        <p:txBody>
+          <a:bodyPr rtlCol="0" anchor="ctr"/>
+          <a:lstStyle/>
+          <a:p>
+            <a:pPr algn="ctr"/>
+            <a:r>
+              <a:rPr lang="en-US" dirty="0"/>
+              <a:t>…</a:t>
+            </a:r>
+            <a:endParaRPr lang="ru-RU" dirty="0"/>
+          </a:p>
+        </p:txBody>
+      </p:sp>
     </p:spTree>
   </p:cSld>
   <p:clrMapOvr>
@@ -28213,7 +28764,7 @@
               <a:t>Компиляторы С/С++ имеют право проводить любые преобразования с кодом, которые сохраняют итоговый порядок возникновения наблюдаемых эффектов (</a:t>
             </a:r>
             <a:r>
-              <a:rPr lang="en-US" sz="2000" dirty="0"/>
+              <a:rPr lang="en-US" sz="2000" b="1" dirty="0"/>
               <a:t>side effects</a:t>
             </a:r>
             <a:r>
@@ -34561,8 +35112,8 @@
         </p:nvSpPr>
         <p:spPr bwMode="auto">
           <a:xfrm>
-            <a:off x="838200" y="1825624"/>
-            <a:ext cx="6177077" cy="4895851"/>
+            <a:off x="838200" y="1509364"/>
+            <a:ext cx="6177077" cy="5269571"/>
           </a:xfrm>
         </p:spPr>
         <p:txBody>
@@ -34576,10 +35127,10 @@
               <a:defRPr/>
             </a:pPr>
             <a:r>
-              <a:rPr lang="ru-RU" sz="2000"/>
+              <a:rPr lang="ru-RU" sz="2000" dirty="0"/>
               <a:t>Для обработки ошибок в языке С++ был введен механизм исключений.</a:t>
             </a:r>
-            <a:endParaRPr/>
+            <a:endParaRPr dirty="0"/>
           </a:p>
           <a:p>
             <a:pPr marL="0" indent="0">
@@ -34587,14 +35138,14 @@
               <a:defRPr/>
             </a:pPr>
             <a:r>
-              <a:rPr lang="ru-RU" sz="2000" b="1"/>
+              <a:rPr lang="ru-RU" sz="2000" b="1" dirty="0"/>
               <a:t>Исключительная ситуация </a:t>
             </a:r>
             <a:r>
-              <a:rPr lang="ru-RU" sz="2000"/>
+              <a:rPr lang="ru-RU" sz="2000" dirty="0"/>
               <a:t>– ситуация, при которой дальнейшее выполнение программы невозможно.</a:t>
             </a:r>
-            <a:endParaRPr/>
+            <a:endParaRPr dirty="0"/>
           </a:p>
           <a:p>
             <a:pPr marL="0" indent="0">
@@ -34602,10 +35153,14 @@
               <a:defRPr/>
             </a:pPr>
             <a:r>
-              <a:rPr lang="ru-RU" sz="2000"/>
-              <a:t>Исключение – объект, содержащий информацию об исключительной ситуации.</a:t>
-            </a:r>
-            <a:endParaRPr lang="en-US" sz="2000"/>
+              <a:rPr lang="ru-RU" sz="2000" b="1" dirty="0"/>
+              <a:t>Исключение</a:t>
+            </a:r>
+            <a:r>
+              <a:rPr lang="ru-RU" sz="2000" dirty="0"/>
+              <a:t> – объект, содержащий информацию об исключительной ситуации.</a:t>
+            </a:r>
+            <a:endParaRPr lang="en-US" sz="2000" dirty="0"/>
           </a:p>
           <a:p>
             <a:pPr marL="0" indent="0">
@@ -34613,10 +35168,10 @@
               <a:defRPr/>
             </a:pPr>
             <a:r>
-              <a:rPr lang="ru-RU" sz="2000"/>
-              <a:t>Если исключение было брошено, и в текущей функции для него определен обработчик, то на стеке уничтожаются только переменные, принадлежащие текущему  блоку кода.</a:t>
-            </a:r>
-            <a:endParaRPr/>
+              <a:rPr lang="ru-RU" sz="2000" dirty="0"/>
+              <a:t>Если исключение было брошено, и в выполняемом блоке кода для него определен обработчик, то на стеке уничтожаются только переменные, принадлежащие текущему  блоку кода, после чего управление передается обработчику.</a:t>
+            </a:r>
+            <a:endParaRPr dirty="0"/>
           </a:p>
           <a:p>
             <a:pPr marL="0" indent="0">
@@ -34624,10 +35179,10 @@
               <a:defRPr/>
             </a:pPr>
             <a:r>
-              <a:rPr lang="ru-RU" sz="2000"/>
+              <a:rPr lang="ru-RU" sz="2000" dirty="0"/>
               <a:t>Если в текущей функции нет подходящего обработчика, то начинается процесс раскрутки стека.</a:t>
             </a:r>
-            <a:endParaRPr lang="en-US" sz="2000"/>
+            <a:endParaRPr lang="en-US" sz="2000" dirty="0"/>
           </a:p>
           <a:p>
             <a:pPr marL="0" indent="0">
@@ -34635,21 +35190,25 @@
               <a:defRPr/>
             </a:pPr>
             <a:r>
-              <a:rPr lang="ru-RU" sz="2000"/>
+              <a:rPr lang="ru-RU" sz="2000" dirty="0"/>
               <a:t>До введения исключений единственным способом узнать об ошибке было сочетание специальных возвращаемых значений и системного макроса </a:t>
             </a:r>
             <a:r>
-              <a:rPr lang="en-US" sz="2000"/>
-              <a:t>errno.</a:t>
-            </a:r>
-            <a:endParaRPr lang="ru-RU" sz="2000"/>
+              <a:rPr lang="en-US" sz="2000" dirty="0" err="1"/>
+              <a:t>errno</a:t>
+            </a:r>
+            <a:r>
+              <a:rPr lang="en-US" sz="2000" dirty="0"/>
+              <a:t>.</a:t>
+            </a:r>
+            <a:endParaRPr lang="ru-RU" sz="2000" dirty="0"/>
           </a:p>
           <a:p>
             <a:pPr marL="0" indent="0">
               <a:buNone/>
               <a:defRPr/>
             </a:pPr>
-            <a:endParaRPr lang="en-US" sz="2000"/>
+            <a:endParaRPr lang="en-US" sz="2000" dirty="0"/>
           </a:p>
         </p:txBody>
       </p:sp>
@@ -35194,18 +35753,18 @@
               <a:defRPr/>
             </a:pPr>
             <a:r>
-              <a:rPr lang="ru-RU" sz="2000"/>
+              <a:rPr lang="ru-RU" sz="2000" dirty="0"/>
               <a:t>В ходе раскрутки стека (</a:t>
             </a:r>
             <a:r>
-              <a:rPr lang="en-US" sz="2000" b="1"/>
+              <a:rPr lang="en-US" sz="2000" b="1" dirty="0"/>
               <a:t>stack unwinding</a:t>
             </a:r>
             <a:r>
-              <a:rPr lang="ru-RU" sz="2000"/>
+              <a:rPr lang="ru-RU" sz="2000" dirty="0"/>
               <a:t>) сначала уничтожаются все объекты в текущем кадре стека в порядке их создания.</a:t>
             </a:r>
-            <a:endParaRPr/>
+            <a:endParaRPr dirty="0"/>
           </a:p>
           <a:p>
             <a:pPr marL="0" indent="0">
@@ -35213,10 +35772,10 @@
               <a:defRPr/>
             </a:pPr>
             <a:r>
-              <a:rPr lang="ru-RU" sz="2000"/>
+              <a:rPr lang="ru-RU" sz="2000" dirty="0"/>
               <a:t>Затем из стека достается адрес возврата, проверяется наличие обработчика в вызывающей функции.</a:t>
             </a:r>
-            <a:endParaRPr/>
+            <a:endParaRPr dirty="0"/>
           </a:p>
           <a:p>
             <a:pPr marL="0" indent="0">
@@ -35224,10 +35783,10 @@
               <a:defRPr/>
             </a:pPr>
             <a:r>
-              <a:rPr lang="ru-RU" sz="2000"/>
+              <a:rPr lang="ru-RU" sz="2000" dirty="0"/>
               <a:t>Если обработчик есть – уничтожаются локальные переменные в текущем блоке кода и происходит прыжок на обработчик.</a:t>
             </a:r>
-            <a:endParaRPr/>
+            <a:endParaRPr dirty="0"/>
           </a:p>
           <a:p>
             <a:pPr marL="0" indent="0">
@@ -35235,10 +35794,10 @@
               <a:defRPr/>
             </a:pPr>
             <a:r>
-              <a:rPr lang="ru-RU" sz="2000"/>
+              <a:rPr lang="ru-RU" sz="2000" dirty="0"/>
               <a:t>Если обработчика нет – раскрутка продолжается.</a:t>
             </a:r>
-            <a:endParaRPr lang="en-US" sz="2000"/>
+            <a:endParaRPr lang="en-US" sz="2000" dirty="0"/>
           </a:p>
         </p:txBody>
       </p:sp>
@@ -35294,7 +35853,7 @@
               <a:defRPr/>
             </a:pPr>
             <a:r>
-              <a:rPr lang="en-US" b="0">
+              <a:rPr lang="en-US" b="0" dirty="0">
                 <a:solidFill>
                   <a:srgbClr val="0000FF"/>
                 </a:solidFill>
@@ -35303,7 +35862,7 @@
               <a:t>void</a:t>
             </a:r>
             <a:r>
-              <a:rPr lang="en-US" b="0">
+              <a:rPr lang="en-US" b="0" dirty="0">
                 <a:solidFill>
                   <a:srgbClr val="000000"/>
                 </a:solidFill>
@@ -35311,14 +35870,14 @@
               </a:rPr>
               <a:t> foo(){</a:t>
             </a:r>
-            <a:endParaRPr/>
-          </a:p>
-          <a:p>
-            <a:pPr>
-              <a:defRPr/>
-            </a:pPr>
-            <a:r>
-              <a:rPr lang="en-US" b="0">
+            <a:endParaRPr dirty="0"/>
+          </a:p>
+          <a:p>
+            <a:pPr>
+              <a:defRPr/>
+            </a:pPr>
+            <a:r>
+              <a:rPr lang="en-US" b="0" dirty="0">
                 <a:solidFill>
                   <a:srgbClr val="000000"/>
                 </a:solidFill>
@@ -35327,7 +35886,7 @@
               <a:t>    S c{</a:t>
             </a:r>
             <a:r>
-              <a:rPr lang="en-US" b="0">
+              <a:rPr lang="en-US" b="0" dirty="0">
                 <a:solidFill>
                   <a:srgbClr val="A31515"/>
                 </a:solidFill>
@@ -35336,7 +35895,7 @@
               <a:t>"C"</a:t>
             </a:r>
             <a:r>
-              <a:rPr lang="en-US" b="0">
+              <a:rPr lang="en-US" b="0" dirty="0">
                 <a:solidFill>
                   <a:srgbClr val="000000"/>
                 </a:solidFill>
@@ -35344,14 +35903,14 @@
               </a:rPr>
               <a:t>};</a:t>
             </a:r>
-            <a:endParaRPr/>
-          </a:p>
-          <a:p>
-            <a:pPr>
-              <a:defRPr/>
-            </a:pPr>
-            <a:r>
-              <a:rPr lang="en-US" b="0">
+            <a:endParaRPr dirty="0"/>
+          </a:p>
+          <a:p>
+            <a:pPr>
+              <a:defRPr/>
+            </a:pPr>
+            <a:r>
+              <a:rPr lang="en-US" b="0" dirty="0">
                 <a:solidFill>
                   <a:srgbClr val="000000"/>
                 </a:solidFill>
@@ -35360,7 +35919,7 @@
               <a:t>    </a:t>
             </a:r>
             <a:r>
-              <a:rPr lang="en-US" b="0">
+              <a:rPr lang="en-US" b="0" dirty="0">
                 <a:solidFill>
                   <a:srgbClr val="0000FF"/>
                 </a:solidFill>
@@ -35369,7 +35928,7 @@
               <a:t>if</a:t>
             </a:r>
             <a:r>
-              <a:rPr lang="en-US" b="0">
+              <a:rPr lang="en-US" b="0" dirty="0">
                 <a:solidFill>
                   <a:srgbClr val="000000"/>
                 </a:solidFill>
@@ -35377,14 +35936,14 @@
               </a:rPr>
               <a:t>(rand())</a:t>
             </a:r>
-            <a:endParaRPr/>
-          </a:p>
-          <a:p>
-            <a:pPr>
-              <a:defRPr/>
-            </a:pPr>
-            <a:r>
-              <a:rPr lang="en-US" b="0">
+            <a:endParaRPr dirty="0"/>
+          </a:p>
+          <a:p>
+            <a:pPr>
+              <a:defRPr/>
+            </a:pPr>
+            <a:r>
+              <a:rPr lang="en-US" b="0" dirty="0">
                 <a:solidFill>
                   <a:srgbClr val="000000"/>
                 </a:solidFill>
@@ -35393,7 +35952,7 @@
               <a:t>        </a:t>
             </a:r>
             <a:r>
-              <a:rPr lang="en-US" b="0">
+              <a:rPr lang="en-US" b="0" dirty="0">
                 <a:solidFill>
                   <a:srgbClr val="0000FF"/>
                 </a:solidFill>
@@ -35402,16 +35961,34 @@
               <a:t>throw</a:t>
             </a:r>
             <a:r>
-              <a:rPr lang="en-US" b="0">
-                <a:solidFill>
-                  <a:srgbClr val="000000"/>
-                </a:solidFill>
-                <a:latin typeface="Consolas"/>
-              </a:rPr>
-              <a:t> std::logic_error(</a:t>
-            </a:r>
-            <a:r>
-              <a:rPr lang="en-US" b="0">
+              <a:rPr lang="en-US" b="0" dirty="0">
+                <a:solidFill>
+                  <a:srgbClr val="000000"/>
+                </a:solidFill>
+                <a:latin typeface="Consolas"/>
+              </a:rPr>
+              <a:t> std::</a:t>
+            </a:r>
+            <a:r>
+              <a:rPr lang="en-US" b="0" dirty="0" err="1">
+                <a:solidFill>
+                  <a:srgbClr val="000000"/>
+                </a:solidFill>
+                <a:latin typeface="Consolas"/>
+              </a:rPr>
+              <a:t>logic_error</a:t>
+            </a:r>
+            <a:r>
+              <a:rPr lang="en-US" b="0" dirty="0">
+                <a:solidFill>
+                  <a:srgbClr val="000000"/>
+                </a:solidFill>
+                <a:latin typeface="Consolas"/>
+              </a:rPr>
+              <a:t>(</a:t>
+            </a:r>
+            <a:r>
+              <a:rPr lang="en-US" b="0" dirty="0">
                 <a:solidFill>
                   <a:srgbClr val="A31515"/>
                 </a:solidFill>
@@ -35420,7 +35997,7 @@
               <a:t>""</a:t>
             </a:r>
             <a:r>
-              <a:rPr lang="en-US" b="0">
+              <a:rPr lang="en-US" b="0" dirty="0">
                 <a:solidFill>
                   <a:srgbClr val="000000"/>
                 </a:solidFill>
@@ -35428,14 +36005,14 @@
               </a:rPr>
               <a:t>);</a:t>
             </a:r>
-            <a:endParaRPr/>
-          </a:p>
-          <a:p>
-            <a:pPr>
-              <a:defRPr/>
-            </a:pPr>
-            <a:r>
-              <a:rPr lang="en-US" b="0">
+            <a:endParaRPr dirty="0"/>
+          </a:p>
+          <a:p>
+            <a:pPr>
+              <a:defRPr/>
+            </a:pPr>
+            <a:r>
+              <a:rPr lang="en-US" b="0" dirty="0">
                 <a:solidFill>
                   <a:srgbClr val="000000"/>
                 </a:solidFill>
@@ -35443,14 +36020,14 @@
               </a:rPr>
               <a:t>}</a:t>
             </a:r>
-            <a:endParaRPr/>
+            <a:endParaRPr dirty="0"/>
           </a:p>
           <a:p>
             <a:pPr>
               <a:defRPr/>
             </a:pPr>
             <a:br>
-              <a:rPr lang="en-US" b="0">
+              <a:rPr lang="en-US" b="0" dirty="0">
                 <a:solidFill>
                   <a:srgbClr val="000000"/>
                 </a:solidFill>
@@ -35458,7 +36035,7 @@
               </a:rPr>
             </a:br>
             <a:r>
-              <a:rPr lang="en-US" b="0">
+              <a:rPr lang="en-US" b="0" dirty="0">
                 <a:solidFill>
                   <a:srgbClr val="0000FF"/>
                 </a:solidFill>
@@ -35467,7 +36044,7 @@
               <a:t>void</a:t>
             </a:r>
             <a:r>
-              <a:rPr lang="en-US" b="0">
+              <a:rPr lang="en-US" b="0" dirty="0">
                 <a:solidFill>
                   <a:srgbClr val="000000"/>
                 </a:solidFill>
@@ -35475,14 +36052,14 @@
               </a:rPr>
               <a:t> bar(){</a:t>
             </a:r>
-            <a:endParaRPr/>
-          </a:p>
-          <a:p>
-            <a:pPr>
-              <a:defRPr/>
-            </a:pPr>
-            <a:r>
-              <a:rPr lang="en-US" b="0">
+            <a:endParaRPr dirty="0"/>
+          </a:p>
+          <a:p>
+            <a:pPr>
+              <a:defRPr/>
+            </a:pPr>
+            <a:r>
+              <a:rPr lang="en-US" b="0" dirty="0">
                 <a:solidFill>
                   <a:srgbClr val="000000"/>
                 </a:solidFill>
@@ -35491,7 +36068,7 @@
               <a:t>    S a{</a:t>
             </a:r>
             <a:r>
-              <a:rPr lang="en-US" b="0">
+              <a:rPr lang="en-US" b="0" dirty="0">
                 <a:solidFill>
                   <a:srgbClr val="A31515"/>
                 </a:solidFill>
@@ -35500,7 +36077,7 @@
               <a:t>"A"</a:t>
             </a:r>
             <a:r>
-              <a:rPr lang="en-US" b="0">
+              <a:rPr lang="en-US" b="0" dirty="0">
                 <a:solidFill>
                   <a:srgbClr val="000000"/>
                 </a:solidFill>
@@ -35508,14 +36085,14 @@
               </a:rPr>
               <a:t>};</a:t>
             </a:r>
-            <a:endParaRPr/>
-          </a:p>
-          <a:p>
-            <a:pPr>
-              <a:defRPr/>
-            </a:pPr>
-            <a:r>
-              <a:rPr lang="en-US" b="0">
+            <a:endParaRPr dirty="0"/>
+          </a:p>
+          <a:p>
+            <a:pPr>
+              <a:defRPr/>
+            </a:pPr>
+            <a:r>
+              <a:rPr lang="en-US" b="0" dirty="0">
                 <a:solidFill>
                   <a:srgbClr val="000000"/>
                 </a:solidFill>
@@ -35524,7 +36101,7 @@
               <a:t>    </a:t>
             </a:r>
             <a:r>
-              <a:rPr lang="en-US" b="0">
+              <a:rPr lang="en-US" b="0" dirty="0">
                 <a:solidFill>
                   <a:srgbClr val="0000FF"/>
                 </a:solidFill>
@@ -35533,7 +36110,7 @@
               <a:t>try</a:t>
             </a:r>
             <a:r>
-              <a:rPr lang="en-US" b="0">
+              <a:rPr lang="en-US" b="0" dirty="0">
                 <a:solidFill>
                   <a:srgbClr val="000000"/>
                 </a:solidFill>
@@ -35541,14 +36118,14 @@
               </a:rPr>
               <a:t>{</a:t>
             </a:r>
-            <a:endParaRPr/>
-          </a:p>
-          <a:p>
-            <a:pPr>
-              <a:defRPr/>
-            </a:pPr>
-            <a:r>
-              <a:rPr lang="en-US" b="0">
+            <a:endParaRPr dirty="0"/>
+          </a:p>
+          <a:p>
+            <a:pPr>
+              <a:defRPr/>
+            </a:pPr>
+            <a:r>
+              <a:rPr lang="en-US" b="0" dirty="0">
                 <a:solidFill>
                   <a:srgbClr val="000000"/>
                 </a:solidFill>
@@ -35557,16 +36134,34 @@
               <a:t>        S b{</a:t>
             </a:r>
             <a:r>
-              <a:rPr lang="en-US" b="0">
+              <a:rPr lang="en-US" b="0" dirty="0">
                 <a:solidFill>
                   <a:srgbClr val="A31515"/>
                 </a:solidFill>
                 <a:latin typeface="Consolas"/>
               </a:rPr>
-              <a:t>"b"</a:t>
-            </a:r>
-            <a:r>
-              <a:rPr lang="en-US" b="0">
+              <a:t>«</a:t>
+            </a:r>
+            <a:r>
+              <a:rPr lang="en-US" dirty="0">
+                <a:solidFill>
+                  <a:srgbClr val="A31515"/>
+                </a:solidFill>
+                <a:latin typeface="Consolas"/>
+              </a:rPr>
+              <a:t>B</a:t>
+            </a:r>
+            <a:r>
+              <a:rPr lang="en-US" b="0" dirty="0">
+                <a:solidFill>
+                  <a:srgbClr val="A31515"/>
+                </a:solidFill>
+                <a:latin typeface="Consolas"/>
+              </a:rPr>
+              <a:t>"</a:t>
+            </a:r>
+            <a:r>
+              <a:rPr lang="en-US" b="0" dirty="0">
                 <a:solidFill>
                   <a:srgbClr val="000000"/>
                 </a:solidFill>
@@ -35574,14 +36169,14 @@
               </a:rPr>
               <a:t>};</a:t>
             </a:r>
-            <a:endParaRPr/>
-          </a:p>
-          <a:p>
-            <a:pPr>
-              <a:defRPr/>
-            </a:pPr>
-            <a:r>
-              <a:rPr lang="en-US" b="0">
+            <a:endParaRPr dirty="0"/>
+          </a:p>
+          <a:p>
+            <a:pPr>
+              <a:defRPr/>
+            </a:pPr>
+            <a:r>
+              <a:rPr lang="en-US" b="0" dirty="0">
                 <a:solidFill>
                   <a:srgbClr val="000000"/>
                 </a:solidFill>
@@ -35589,14 +36184,14 @@
               </a:rPr>
               <a:t>        foo();</a:t>
             </a:r>
-            <a:endParaRPr/>
-          </a:p>
-          <a:p>
-            <a:pPr>
-              <a:defRPr/>
-            </a:pPr>
-            <a:r>
-              <a:rPr lang="en-US" b="0">
+            <a:endParaRPr dirty="0"/>
+          </a:p>
+          <a:p>
+            <a:pPr>
+              <a:defRPr/>
+            </a:pPr>
+            <a:r>
+              <a:rPr lang="en-US" b="0" dirty="0">
                 <a:solidFill>
                   <a:srgbClr val="000000"/>
                 </a:solidFill>
@@ -35605,7 +36200,7 @@
               <a:t>    }</a:t>
             </a:r>
             <a:r>
-              <a:rPr lang="en-US" b="0">
+              <a:rPr lang="en-US" b="0" dirty="0">
                 <a:solidFill>
                   <a:srgbClr val="0000FF"/>
                 </a:solidFill>
@@ -35614,31 +36209,67 @@
               <a:t>catch</a:t>
             </a:r>
             <a:r>
-              <a:rPr lang="en-US" b="0">
-                <a:solidFill>
-                  <a:srgbClr val="000000"/>
-                </a:solidFill>
-                <a:latin typeface="Consolas"/>
-              </a:rPr>
-              <a:t>(std::logic_error&amp; e){</a:t>
-            </a:r>
-            <a:endParaRPr/>
-          </a:p>
-          <a:p>
-            <a:pPr>
-              <a:defRPr/>
-            </a:pPr>
-            <a:r>
-              <a:rPr lang="en-US" b="0">
-                <a:solidFill>
-                  <a:srgbClr val="000000"/>
-                </a:solidFill>
-                <a:latin typeface="Consolas"/>
-              </a:rPr>
-              <a:t>        printf(</a:t>
-            </a:r>
-            <a:r>
-              <a:rPr lang="en-US" b="0">
+              <a:rPr lang="en-US" b="0" dirty="0">
+                <a:solidFill>
+                  <a:srgbClr val="000000"/>
+                </a:solidFill>
+                <a:latin typeface="Consolas"/>
+              </a:rPr>
+              <a:t>(std::</a:t>
+            </a:r>
+            <a:r>
+              <a:rPr lang="en-US" b="0" dirty="0" err="1">
+                <a:solidFill>
+                  <a:srgbClr val="000000"/>
+                </a:solidFill>
+                <a:latin typeface="Consolas"/>
+              </a:rPr>
+              <a:t>logic_error</a:t>
+            </a:r>
+            <a:r>
+              <a:rPr lang="en-US" b="0" dirty="0">
+                <a:solidFill>
+                  <a:srgbClr val="000000"/>
+                </a:solidFill>
+                <a:latin typeface="Consolas"/>
+              </a:rPr>
+              <a:t>&amp; e){</a:t>
+            </a:r>
+            <a:endParaRPr dirty="0"/>
+          </a:p>
+          <a:p>
+            <a:pPr>
+              <a:defRPr/>
+            </a:pPr>
+            <a:r>
+              <a:rPr lang="en-US" b="0" dirty="0">
+                <a:solidFill>
+                  <a:srgbClr val="000000"/>
+                </a:solidFill>
+                <a:latin typeface="Consolas"/>
+              </a:rPr>
+              <a:t>        </a:t>
+            </a:r>
+            <a:r>
+              <a:rPr lang="en-US" b="0" dirty="0" err="1">
+                <a:solidFill>
+                  <a:srgbClr val="000000"/>
+                </a:solidFill>
+                <a:latin typeface="Consolas"/>
+              </a:rPr>
+              <a:t>printf</a:t>
+            </a:r>
+            <a:r>
+              <a:rPr lang="en-US" b="0" dirty="0">
+                <a:solidFill>
+                  <a:srgbClr val="000000"/>
+                </a:solidFill>
+                <a:latin typeface="Consolas"/>
+              </a:rPr>
+              <a:t>(</a:t>
+            </a:r>
+            <a:r>
+              <a:rPr lang="en-US" b="0" dirty="0">
                 <a:solidFill>
                   <a:srgbClr val="A31515"/>
                 </a:solidFill>
@@ -35647,7 +36278,7 @@
               <a:t>"Caught!\n"</a:t>
             </a:r>
             <a:r>
-              <a:rPr lang="en-US" b="0">
+              <a:rPr lang="en-US" b="0" dirty="0">
                 <a:solidFill>
                   <a:srgbClr val="000000"/>
                 </a:solidFill>
@@ -35655,14 +36286,14 @@
               </a:rPr>
               <a:t>);</a:t>
             </a:r>
-            <a:endParaRPr/>
-          </a:p>
-          <a:p>
-            <a:pPr>
-              <a:defRPr/>
-            </a:pPr>
-            <a:r>
-              <a:rPr lang="en-US" b="0">
+            <a:endParaRPr dirty="0"/>
+          </a:p>
+          <a:p>
+            <a:pPr>
+              <a:defRPr/>
+            </a:pPr>
+            <a:r>
+              <a:rPr lang="en-US" b="0" dirty="0">
                 <a:solidFill>
                   <a:srgbClr val="000000"/>
                 </a:solidFill>
@@ -35670,14 +36301,14 @@
               </a:rPr>
               <a:t>    }</a:t>
             </a:r>
-            <a:endParaRPr/>
-          </a:p>
-          <a:p>
-            <a:pPr>
-              <a:defRPr/>
-            </a:pPr>
-            <a:r>
-              <a:rPr lang="en-US" b="0">
+            <a:endParaRPr dirty="0"/>
+          </a:p>
+          <a:p>
+            <a:pPr>
+              <a:defRPr/>
+            </a:pPr>
+            <a:r>
+              <a:rPr lang="en-US" b="0" dirty="0">
                 <a:solidFill>
                   <a:srgbClr val="000000"/>
                 </a:solidFill>
@@ -35685,7 +36316,7 @@
               </a:rPr>
               <a:t>}</a:t>
             </a:r>
-            <a:endParaRPr/>
+            <a:endParaRPr dirty="0"/>
           </a:p>
         </p:txBody>
       </p:sp>
@@ -38501,7 +39132,7 @@
               <a:defRPr/>
             </a:pPr>
             <a:r>
-              <a:rPr lang="ru-RU" u="sng">
+              <a:rPr lang="ru-RU" u="sng" dirty="0">
                 <a:solidFill>
                   <a:schemeClr val="hlink"/>
                 </a:solidFill>
@@ -38509,7 +39140,7 @@
               </a:rPr>
               <a:t>https://godbolt.org/z/sKTdaW9cf</a:t>
             </a:r>
-            <a:endParaRPr lang="ru-RU"/>
+            <a:endParaRPr lang="ru-RU" dirty="0"/>
           </a:p>
         </p:txBody>
       </p:sp>
@@ -40131,7 +40762,7 @@
               <a:defRPr/>
             </a:pPr>
             <a:r>
-              <a:rPr sz="1600" b="0" i="0" u="none">
+              <a:rPr sz="1600" b="0" i="0" u="none" dirty="0">
                 <a:solidFill>
                   <a:srgbClr val="0000FF"/>
                 </a:solidFill>
@@ -40142,7 +40773,7 @@
               <a:t>const</a:t>
             </a:r>
             <a:r>
-              <a:rPr sz="1600" b="0" i="0" u="none">
+              <a:rPr sz="1600" b="0" i="0" u="none" dirty="0">
                 <a:solidFill>
                   <a:srgbClr val="000000"/>
                 </a:solidFill>
@@ -40153,7 +40784,7 @@
               <a:t> </a:t>
             </a:r>
             <a:r>
-              <a:rPr sz="1600" b="0" i="0" u="none">
+              <a:rPr sz="1600" b="0" i="0" u="none" dirty="0">
                 <a:solidFill>
                   <a:srgbClr val="0000FF"/>
                 </a:solidFill>
@@ -40164,7 +40795,7 @@
               <a:t>int</a:t>
             </a:r>
             <a:r>
-              <a:rPr sz="1600" b="0" i="0" u="none">
+              <a:rPr sz="1600" b="0" i="0" u="none" dirty="0">
                 <a:solidFill>
                   <a:srgbClr val="000000"/>
                 </a:solidFill>
@@ -40175,7 +40806,7 @@
               <a:t>*  search(</a:t>
             </a:r>
             <a:r>
-              <a:rPr sz="1600" b="0" i="0" u="none">
+              <a:rPr sz="1600" b="0" i="0" u="none" dirty="0">
                 <a:solidFill>
                   <a:srgbClr val="0000FF"/>
                 </a:solidFill>
@@ -40186,7 +40817,7 @@
               <a:t>const</a:t>
             </a:r>
             <a:r>
-              <a:rPr sz="1600" b="0" i="0" u="none">
+              <a:rPr sz="1600" b="0" i="0" u="none" dirty="0">
                 <a:solidFill>
                   <a:srgbClr val="000000"/>
                 </a:solidFill>
@@ -40197,7 +40828,7 @@
               <a:t> </a:t>
             </a:r>
             <a:r>
-              <a:rPr sz="1600" b="0" i="0" u="none">
+              <a:rPr sz="1600" b="0" i="0" u="none" dirty="0">
                 <a:solidFill>
                   <a:srgbClr val="0000FF"/>
                 </a:solidFill>
@@ -40208,7 +40839,7 @@
               <a:t>int</a:t>
             </a:r>
             <a:r>
-              <a:rPr sz="1600" b="0" i="0" u="none">
+              <a:rPr sz="1600" b="0" i="0" u="none" dirty="0">
                 <a:solidFill>
                   <a:srgbClr val="000000"/>
                 </a:solidFill>
@@ -40219,7 +40850,7 @@
               <a:t>* start, </a:t>
             </a:r>
             <a:r>
-              <a:rPr sz="1600" b="0" i="0" u="none">
+              <a:rPr sz="1600" b="0" i="0" u="none" dirty="0">
                 <a:solidFill>
                   <a:srgbClr val="0000FF"/>
                 </a:solidFill>
@@ -40230,7 +40861,7 @@
               <a:t>const</a:t>
             </a:r>
             <a:r>
-              <a:rPr sz="1600" b="0" i="0" u="none">
+              <a:rPr sz="1600" b="0" i="0" u="none" dirty="0">
                 <a:solidFill>
                   <a:srgbClr val="000000"/>
                 </a:solidFill>
@@ -40241,7 +40872,7 @@
               <a:t> </a:t>
             </a:r>
             <a:r>
-              <a:rPr sz="1600" b="0" i="0" u="none">
+              <a:rPr sz="1600" b="0" i="0" u="none" dirty="0">
                 <a:solidFill>
                   <a:srgbClr val="0000FF"/>
                 </a:solidFill>
@@ -40252,7 +40883,7 @@
               <a:t>int</a:t>
             </a:r>
             <a:r>
-              <a:rPr sz="1600" b="0" i="0" u="none">
+              <a:rPr sz="1600" b="0" i="0" u="none" dirty="0">
                 <a:solidFill>
                   <a:srgbClr val="000000"/>
                 </a:solidFill>
@@ -40262,14 +40893,14 @@
               </a:rPr>
               <a:t>* end, </a:t>
             </a:r>
-            <a:endParaRPr sz="2600"/>
-          </a:p>
-          <a:p>
-            <a:pPr>
-              <a:defRPr/>
-            </a:pPr>
-            <a:r>
-              <a:rPr sz="1600" b="0" i="0" u="none">
+            <a:endParaRPr sz="2600" dirty="0"/>
+          </a:p>
+          <a:p>
+            <a:pPr>
+              <a:defRPr/>
+            </a:pPr>
+            <a:r>
+              <a:rPr sz="1600" b="0" i="0" u="none" dirty="0">
                 <a:solidFill>
                   <a:srgbClr val="000000"/>
                 </a:solidFill>
@@ -40280,7 +40911,7 @@
               <a:t>                                        </a:t>
             </a:r>
             <a:r>
-              <a:rPr sz="1600" b="0" i="0" u="none">
+              <a:rPr sz="1600" b="0" i="0" u="none" dirty="0">
                 <a:solidFill>
                   <a:srgbClr val="0000FF"/>
                 </a:solidFill>
@@ -40291,7 +40922,7 @@
               <a:t>int</a:t>
             </a:r>
             <a:r>
-              <a:rPr sz="1600" b="0" i="0" u="none">
+              <a:rPr sz="1600" b="0" i="0" u="none" dirty="0">
                 <a:solidFill>
                   <a:srgbClr val="000000"/>
                 </a:solidFill>
@@ -40301,14 +40932,14 @@
               </a:rPr>
               <a:t> value){</a:t>
             </a:r>
-            <a:endParaRPr sz="2600"/>
-          </a:p>
-          <a:p>
-            <a:pPr>
-              <a:defRPr/>
-            </a:pPr>
-            <a:r>
-              <a:rPr sz="1600" b="0" i="0" u="none">
+            <a:endParaRPr sz="2600" dirty="0"/>
+          </a:p>
+          <a:p>
+            <a:pPr>
+              <a:defRPr/>
+            </a:pPr>
+            <a:r>
+              <a:rPr sz="1600" b="0" i="0" u="none" dirty="0">
                 <a:solidFill>
                   <a:srgbClr val="000000"/>
                 </a:solidFill>
@@ -40319,7 +40950,7 @@
               <a:t>    </a:t>
             </a:r>
             <a:r>
-              <a:rPr sz="1600" b="0" i="0" u="none">
+              <a:rPr sz="1600" b="0" i="0" u="none" dirty="0">
                 <a:solidFill>
                   <a:srgbClr val="0000FF"/>
                 </a:solidFill>
@@ -40330,7 +40961,7 @@
               <a:t>while</a:t>
             </a:r>
             <a:r>
-              <a:rPr sz="1600" b="0" i="0" u="none">
+              <a:rPr sz="1600" b="0" i="0" u="none" dirty="0">
                 <a:solidFill>
                   <a:srgbClr val="000000"/>
                 </a:solidFill>
@@ -40340,14 +40971,14 @@
               </a:rPr>
               <a:t>(start != end){</a:t>
             </a:r>
-            <a:endParaRPr sz="2600"/>
-          </a:p>
-          <a:p>
-            <a:pPr>
-              <a:defRPr/>
-            </a:pPr>
-            <a:r>
-              <a:rPr sz="1600" b="0" i="0" u="none">
+            <a:endParaRPr sz="2600" dirty="0"/>
+          </a:p>
+          <a:p>
+            <a:pPr>
+              <a:defRPr/>
+            </a:pPr>
+            <a:r>
+              <a:rPr sz="1600" b="0" i="0" u="none" dirty="0">
                 <a:solidFill>
                   <a:srgbClr val="000000"/>
                 </a:solidFill>
@@ -40358,7 +40989,7 @@
               <a:t>        </a:t>
             </a:r>
             <a:r>
-              <a:rPr sz="1600" b="0" i="0" u="none">
+              <a:rPr sz="1600" b="0" i="0" u="none" dirty="0">
                 <a:solidFill>
                   <a:srgbClr val="0000FF"/>
                 </a:solidFill>
@@ -40369,7 +41000,7 @@
               <a:t>if</a:t>
             </a:r>
             <a:r>
-              <a:rPr sz="1600" b="0" i="0" u="none">
+              <a:rPr sz="1600" b="0" i="0" u="none" dirty="0">
                 <a:solidFill>
                   <a:srgbClr val="000000"/>
                 </a:solidFill>
@@ -40379,14 +41010,14 @@
               </a:rPr>
               <a:t>(*start == value)</a:t>
             </a:r>
-            <a:endParaRPr sz="2600"/>
-          </a:p>
-          <a:p>
-            <a:pPr>
-              <a:defRPr/>
-            </a:pPr>
-            <a:r>
-              <a:rPr sz="1600" b="0" i="0" u="none">
+            <a:endParaRPr sz="2600" dirty="0"/>
+          </a:p>
+          <a:p>
+            <a:pPr>
+              <a:defRPr/>
+            </a:pPr>
+            <a:r>
+              <a:rPr sz="1600" b="0" i="0" u="none" dirty="0">
                 <a:solidFill>
                   <a:srgbClr val="000000"/>
                 </a:solidFill>
@@ -40397,7 +41028,7 @@
               <a:t>            </a:t>
             </a:r>
             <a:r>
-              <a:rPr sz="1600" b="0" i="0" u="none">
+              <a:rPr sz="1600" b="0" i="0" u="none" dirty="0">
                 <a:solidFill>
                   <a:srgbClr val="0000FF"/>
                 </a:solidFill>
@@ -40408,7 +41039,7 @@
               <a:t>return</a:t>
             </a:r>
             <a:r>
-              <a:rPr sz="1600" b="0" i="0" u="none">
+              <a:rPr sz="1600" b="0" i="0" u="none" dirty="0">
                 <a:solidFill>
                   <a:srgbClr val="000000"/>
                 </a:solidFill>
@@ -40418,14 +41049,14 @@
               </a:rPr>
               <a:t> start;</a:t>
             </a:r>
-            <a:endParaRPr sz="2600"/>
-          </a:p>
-          <a:p>
-            <a:pPr>
-              <a:defRPr/>
-            </a:pPr>
-            <a:r>
-              <a:rPr sz="1600" b="0" i="0" u="none">
+            <a:endParaRPr sz="2600" dirty="0"/>
+          </a:p>
+          <a:p>
+            <a:pPr>
+              <a:defRPr/>
+            </a:pPr>
+            <a:r>
+              <a:rPr sz="1600" b="0" i="0" u="none" dirty="0">
                 <a:solidFill>
                   <a:srgbClr val="000000"/>
                 </a:solidFill>
@@ -40435,14 +41066,14 @@
               </a:rPr>
               <a:t>        ++start;</a:t>
             </a:r>
-            <a:endParaRPr sz="2600"/>
-          </a:p>
-          <a:p>
-            <a:pPr>
-              <a:defRPr/>
-            </a:pPr>
-            <a:r>
-              <a:rPr sz="1600" b="0" i="0" u="none">
+            <a:endParaRPr sz="2600" dirty="0"/>
+          </a:p>
+          <a:p>
+            <a:pPr>
+              <a:defRPr/>
+            </a:pPr>
+            <a:r>
+              <a:rPr sz="1600" b="0" i="0" u="none" dirty="0">
                 <a:solidFill>
                   <a:srgbClr val="000000"/>
                 </a:solidFill>
@@ -40452,14 +41083,14 @@
               </a:rPr>
               <a:t>    }</a:t>
             </a:r>
-            <a:endParaRPr sz="2600"/>
-          </a:p>
-          <a:p>
-            <a:pPr>
-              <a:defRPr/>
-            </a:pPr>
-            <a:r>
-              <a:rPr sz="1600" b="0" i="0" u="none">
+            <a:endParaRPr sz="2600" dirty="0"/>
+          </a:p>
+          <a:p>
+            <a:pPr>
+              <a:defRPr/>
+            </a:pPr>
+            <a:r>
+              <a:rPr sz="1600" b="0" i="0" u="none" dirty="0">
                 <a:solidFill>
                   <a:srgbClr val="000000"/>
                 </a:solidFill>
@@ -40470,7 +41101,7 @@
               <a:t>    </a:t>
             </a:r>
             <a:r>
-              <a:rPr sz="1600" b="0" i="0" u="none">
+              <a:rPr sz="1600" b="0" i="0" u="none" dirty="0">
                 <a:solidFill>
                   <a:srgbClr val="0000FF"/>
                 </a:solidFill>
@@ -40481,7 +41112,7 @@
               <a:t>return</a:t>
             </a:r>
             <a:r>
-              <a:rPr sz="1600" b="0" i="0" u="none">
+              <a:rPr sz="1600" b="0" i="0" u="none" dirty="0">
                 <a:solidFill>
                   <a:srgbClr val="000000"/>
                 </a:solidFill>
@@ -40492,7 +41123,7 @@
               <a:t> </a:t>
             </a:r>
             <a:r>
-              <a:rPr sz="1600" b="0" i="0" u="none">
+              <a:rPr sz="1600" b="0" i="0" u="none" dirty="0" err="1">
                 <a:solidFill>
                   <a:srgbClr val="0000FF"/>
                 </a:solidFill>
@@ -40503,7 +41134,7 @@
               <a:t>nullptr</a:t>
             </a:r>
             <a:r>
-              <a:rPr sz="1600" b="0" i="0" u="none">
+              <a:rPr sz="1600" b="0" i="0" u="none" dirty="0">
                 <a:solidFill>
                   <a:srgbClr val="000000"/>
                 </a:solidFill>
@@ -40513,14 +41144,14 @@
               </a:rPr>
               <a:t>;</a:t>
             </a:r>
-            <a:endParaRPr sz="2600"/>
-          </a:p>
-          <a:p>
-            <a:pPr>
-              <a:defRPr/>
-            </a:pPr>
-            <a:r>
-              <a:rPr sz="1600" b="0" i="0" u="none">
+            <a:endParaRPr sz="2600" dirty="0"/>
+          </a:p>
+          <a:p>
+            <a:pPr>
+              <a:defRPr/>
+            </a:pPr>
+            <a:r>
+              <a:rPr sz="1600" b="0" i="0" u="none" dirty="0">
                 <a:solidFill>
                   <a:srgbClr val="000000"/>
                 </a:solidFill>
@@ -40531,7 +41162,7 @@
               <a:t>}</a:t>
             </a:r>
             <a:br>
-              <a:rPr sz="1600" b="0" i="0" u="none">
+              <a:rPr sz="1600" b="0" i="0" u="none" dirty="0">
                 <a:solidFill>
                   <a:srgbClr val="000000"/>
                 </a:solidFill>
@@ -40540,14 +41171,14 @@
                 <a:cs typeface="Consolas"/>
               </a:rPr>
             </a:br>
-            <a:endParaRPr sz="2600"/>
-          </a:p>
-          <a:p>
-            <a:pPr>
-              <a:defRPr/>
-            </a:pPr>
-            <a:r>
-              <a:rPr sz="1600" b="0" i="0" u="none">
+            <a:endParaRPr sz="2600" dirty="0"/>
+          </a:p>
+          <a:p>
+            <a:pPr>
+              <a:defRPr/>
+            </a:pPr>
+            <a:r>
+              <a:rPr sz="1600" b="0" i="0" u="none" dirty="0">
                 <a:solidFill>
                   <a:srgbClr val="0000FF"/>
                 </a:solidFill>
@@ -40558,7 +41189,7 @@
               <a:t>const</a:t>
             </a:r>
             <a:r>
-              <a:rPr sz="1600" b="0" i="0" u="none">
+              <a:rPr sz="1600" b="0" i="0" u="none" dirty="0">
                 <a:solidFill>
                   <a:srgbClr val="000000"/>
                 </a:solidFill>
@@ -40569,7 +41200,7 @@
               <a:t> </a:t>
             </a:r>
             <a:r>
-              <a:rPr sz="1600" b="0" i="0" u="none">
+              <a:rPr sz="1600" b="0" i="0" u="none" dirty="0">
                 <a:solidFill>
                   <a:srgbClr val="0000FF"/>
                 </a:solidFill>
@@ -40580,7 +41211,7 @@
               <a:t>int</a:t>
             </a:r>
             <a:r>
-              <a:rPr sz="1600" b="0" i="0" u="none">
+              <a:rPr sz="1600" b="0" i="0" u="none" dirty="0">
                 <a:solidFill>
                   <a:srgbClr val="000000"/>
                 </a:solidFill>
@@ -40588,21 +41219,21 @@
                 <a:ea typeface="Consolas"/>
                 <a:cs typeface="Consolas"/>
               </a:rPr>
-              <a:t>*  search_rec(</a:t>
-            </a:r>
-            <a:r>
-              <a:rPr sz="1600" b="0" i="0" u="none">
-                <a:solidFill>
-                  <a:srgbClr val="0000FF"/>
+              <a:t>*  </a:t>
+            </a:r>
+            <a:r>
+              <a:rPr sz="1600" b="0" i="0" u="none" dirty="0" err="1">
+                <a:solidFill>
+                  <a:srgbClr val="000000"/>
                 </a:solidFill>
                 <a:latin typeface="Consolas"/>
                 <a:ea typeface="Consolas"/>
                 <a:cs typeface="Consolas"/>
               </a:rPr>
-              <a:t>const</a:t>
-            </a:r>
-            <a:r>
-              <a:rPr sz="1600" b="0" i="0" u="none">
+              <a:t>search_rec</a:t>
+            </a:r>
+            <a:r>
+              <a:rPr sz="1600" b="0" i="0" u="none" dirty="0">
                 <a:solidFill>
                   <a:srgbClr val="000000"/>
                 </a:solidFill>
@@ -40610,10 +41241,10 @@
                 <a:ea typeface="Consolas"/>
                 <a:cs typeface="Consolas"/>
               </a:rPr>
-              <a:t> </a:t>
-            </a:r>
-            <a:r>
-              <a:rPr sz="1600" b="0" i="0" u="none">
+              <a:t>(</a:t>
+            </a:r>
+            <a:r>
+              <a:rPr sz="1600" b="0" i="0" u="none" dirty="0">
                 <a:solidFill>
                   <a:srgbClr val="0000FF"/>
                 </a:solidFill>
@@ -40621,10 +41252,10 @@
                 <a:ea typeface="Consolas"/>
                 <a:cs typeface="Consolas"/>
               </a:rPr>
-              <a:t>int</a:t>
-            </a:r>
-            <a:r>
-              <a:rPr sz="1600" b="0" i="0" u="none">
+              <a:t>const</a:t>
+            </a:r>
+            <a:r>
+              <a:rPr sz="1600" b="0" i="0" u="none" dirty="0">
                 <a:solidFill>
                   <a:srgbClr val="000000"/>
                 </a:solidFill>
@@ -40632,10 +41263,10 @@
                 <a:ea typeface="Consolas"/>
                 <a:cs typeface="Consolas"/>
               </a:rPr>
-              <a:t>* start, </a:t>
-            </a:r>
-            <a:r>
-              <a:rPr sz="1600" b="0" i="0" u="none">
+              <a:t> </a:t>
+            </a:r>
+            <a:r>
+              <a:rPr sz="1600" b="0" i="0" u="none" dirty="0">
                 <a:solidFill>
                   <a:srgbClr val="0000FF"/>
                 </a:solidFill>
@@ -40643,10 +41274,10 @@
                 <a:ea typeface="Consolas"/>
                 <a:cs typeface="Consolas"/>
               </a:rPr>
-              <a:t>const</a:t>
-            </a:r>
-            <a:r>
-              <a:rPr sz="1600" b="0" i="0" u="none">
+              <a:t>int</a:t>
+            </a:r>
+            <a:r>
+              <a:rPr sz="1600" b="0" i="0" u="none" dirty="0">
                 <a:solidFill>
                   <a:srgbClr val="000000"/>
                 </a:solidFill>
@@ -40654,10 +41285,10 @@
                 <a:ea typeface="Consolas"/>
                 <a:cs typeface="Consolas"/>
               </a:rPr>
-              <a:t> </a:t>
-            </a:r>
-            <a:r>
-              <a:rPr sz="1600" b="0" i="0" u="none">
+              <a:t>* start, </a:t>
+            </a:r>
+            <a:r>
+              <a:rPr sz="1600" b="0" i="0" u="none" dirty="0">
                 <a:solidFill>
                   <a:srgbClr val="0000FF"/>
                 </a:solidFill>
@@ -40665,10 +41296,10 @@
                 <a:ea typeface="Consolas"/>
                 <a:cs typeface="Consolas"/>
               </a:rPr>
-              <a:t>int</a:t>
-            </a:r>
-            <a:r>
-              <a:rPr sz="1600" b="0" i="0" u="none">
+              <a:t>const</a:t>
+            </a:r>
+            <a:r>
+              <a:rPr sz="1600" b="0" i="0" u="none" dirty="0">
                 <a:solidFill>
                   <a:srgbClr val="000000"/>
                 </a:solidFill>
@@ -40676,38 +41307,38 @@
                 <a:ea typeface="Consolas"/>
                 <a:cs typeface="Consolas"/>
               </a:rPr>
-              <a:t>* end, </a:t>
-            </a:r>
-            <a:endParaRPr sz="2600"/>
-          </a:p>
-          <a:p>
-            <a:pPr>
-              <a:defRPr/>
-            </a:pPr>
-            <a:r>
-              <a:rPr sz="1600" b="0" i="0" u="none">
-                <a:solidFill>
-                  <a:srgbClr val="000000"/>
+              <a:t> </a:t>
+            </a:r>
+            <a:r>
+              <a:rPr sz="1600" b="0" i="0" u="none" dirty="0">
+                <a:solidFill>
+                  <a:srgbClr val="0000FF"/>
                 </a:solidFill>
                 <a:latin typeface="Consolas"/>
                 <a:ea typeface="Consolas"/>
                 <a:cs typeface="Consolas"/>
               </a:rPr>
-              <a:t>                                            </a:t>
-            </a:r>
-            <a:r>
-              <a:rPr sz="1600" b="0" i="0" u="none">
-                <a:solidFill>
-                  <a:srgbClr val="0000FF"/>
+              <a:t>int</a:t>
+            </a:r>
+            <a:r>
+              <a:rPr sz="1600" b="0" i="0" u="none" dirty="0">
+                <a:solidFill>
+                  <a:srgbClr val="000000"/>
                 </a:solidFill>
                 <a:latin typeface="Consolas"/>
                 <a:ea typeface="Consolas"/>
                 <a:cs typeface="Consolas"/>
               </a:rPr>
-              <a:t>int</a:t>
-            </a:r>
-            <a:r>
-              <a:rPr sz="1600" b="0" i="0" u="none">
+              <a:t>* end, </a:t>
+            </a:r>
+            <a:endParaRPr sz="2600" dirty="0"/>
+          </a:p>
+          <a:p>
+            <a:pPr>
+              <a:defRPr/>
+            </a:pPr>
+            <a:r>
+              <a:rPr sz="1600" b="0" i="0" u="none" dirty="0">
                 <a:solidFill>
                   <a:srgbClr val="000000"/>
                 </a:solidFill>
@@ -40715,38 +41346,38 @@
                 <a:ea typeface="Consolas"/>
                 <a:cs typeface="Consolas"/>
               </a:rPr>
-              <a:t> value){</a:t>
-            </a:r>
-            <a:endParaRPr sz="2600"/>
-          </a:p>
-          <a:p>
-            <a:pPr>
-              <a:defRPr/>
-            </a:pPr>
-            <a:r>
-              <a:rPr sz="1600" b="0" i="0" u="none">
-                <a:solidFill>
-                  <a:srgbClr val="000000"/>
+              <a:t>                                            </a:t>
+            </a:r>
+            <a:r>
+              <a:rPr sz="1600" b="0" i="0" u="none" dirty="0">
+                <a:solidFill>
+                  <a:srgbClr val="0000FF"/>
                 </a:solidFill>
                 <a:latin typeface="Consolas"/>
                 <a:ea typeface="Consolas"/>
                 <a:cs typeface="Consolas"/>
               </a:rPr>
-              <a:t>    </a:t>
-            </a:r>
-            <a:r>
-              <a:rPr sz="1600" b="0" i="0" u="none">
-                <a:solidFill>
-                  <a:srgbClr val="0000FF"/>
+              <a:t>int</a:t>
+            </a:r>
+            <a:r>
+              <a:rPr sz="1600" b="0" i="0" u="none" dirty="0">
+                <a:solidFill>
+                  <a:srgbClr val="000000"/>
                 </a:solidFill>
                 <a:latin typeface="Consolas"/>
                 <a:ea typeface="Consolas"/>
                 <a:cs typeface="Consolas"/>
               </a:rPr>
-              <a:t>if</a:t>
-            </a:r>
-            <a:r>
-              <a:rPr sz="1600" b="0" i="0" u="none">
+              <a:t> value){</a:t>
+            </a:r>
+            <a:endParaRPr sz="2600" dirty="0"/>
+          </a:p>
+          <a:p>
+            <a:pPr>
+              <a:defRPr/>
+            </a:pPr>
+            <a:r>
+              <a:rPr sz="1600" b="0" i="0" u="none" dirty="0">
                 <a:solidFill>
                   <a:srgbClr val="000000"/>
                 </a:solidFill>
@@ -40754,38 +41385,38 @@
                 <a:ea typeface="Consolas"/>
                 <a:cs typeface="Consolas"/>
               </a:rPr>
-              <a:t>(start == end)</a:t>
-            </a:r>
-            <a:endParaRPr sz="2600"/>
-          </a:p>
-          <a:p>
-            <a:pPr>
-              <a:defRPr/>
-            </a:pPr>
-            <a:r>
-              <a:rPr sz="1600" b="0" i="0" u="none">
-                <a:solidFill>
-                  <a:srgbClr val="000000"/>
+              <a:t>    </a:t>
+            </a:r>
+            <a:r>
+              <a:rPr sz="1600" b="0" i="0" u="none" dirty="0">
+                <a:solidFill>
+                  <a:srgbClr val="0000FF"/>
                 </a:solidFill>
                 <a:latin typeface="Consolas"/>
                 <a:ea typeface="Consolas"/>
                 <a:cs typeface="Consolas"/>
               </a:rPr>
-              <a:t>        </a:t>
-            </a:r>
-            <a:r>
-              <a:rPr sz="1600" b="0" i="0" u="none">
-                <a:solidFill>
-                  <a:srgbClr val="0000FF"/>
+              <a:t>if</a:t>
+            </a:r>
+            <a:r>
+              <a:rPr sz="1600" b="0" i="0" u="none" dirty="0">
+                <a:solidFill>
+                  <a:srgbClr val="000000"/>
                 </a:solidFill>
                 <a:latin typeface="Consolas"/>
                 <a:ea typeface="Consolas"/>
                 <a:cs typeface="Consolas"/>
               </a:rPr>
-              <a:t>return</a:t>
-            </a:r>
-            <a:r>
-              <a:rPr sz="1600" b="0" i="0" u="none">
+              <a:t>(start == end)</a:t>
+            </a:r>
+            <a:endParaRPr sz="2600" dirty="0"/>
+          </a:p>
+          <a:p>
+            <a:pPr>
+              <a:defRPr/>
+            </a:pPr>
+            <a:r>
+              <a:rPr sz="1600" b="0" i="0" u="none" dirty="0">
                 <a:solidFill>
                   <a:srgbClr val="000000"/>
                 </a:solidFill>
@@ -40793,10 +41424,10 @@
                 <a:ea typeface="Consolas"/>
                 <a:cs typeface="Consolas"/>
               </a:rPr>
-              <a:t> </a:t>
-            </a:r>
-            <a:r>
-              <a:rPr sz="1600" b="0" i="0" u="none">
+              <a:t>        </a:t>
+            </a:r>
+            <a:r>
+              <a:rPr sz="1600" b="0" i="0" u="none" dirty="0">
                 <a:solidFill>
                   <a:srgbClr val="0000FF"/>
                 </a:solidFill>
@@ -40804,10 +41435,10 @@
                 <a:ea typeface="Consolas"/>
                 <a:cs typeface="Consolas"/>
               </a:rPr>
-              <a:t>nullptr</a:t>
-            </a:r>
-            <a:r>
-              <a:rPr sz="1600" b="0" i="0" u="none">
+              <a:t>return</a:t>
+            </a:r>
+            <a:r>
+              <a:rPr sz="1600" b="0" i="0" u="none" dirty="0">
                 <a:solidFill>
                   <a:srgbClr val="000000"/>
                 </a:solidFill>
@@ -40815,38 +41446,38 @@
                 <a:ea typeface="Consolas"/>
                 <a:cs typeface="Consolas"/>
               </a:rPr>
-              <a:t>;</a:t>
-            </a:r>
-            <a:endParaRPr sz="2600"/>
-          </a:p>
-          <a:p>
-            <a:pPr>
-              <a:defRPr/>
-            </a:pPr>
-            <a:r>
-              <a:rPr sz="1600" b="0" i="0" u="none">
-                <a:solidFill>
-                  <a:srgbClr val="000000"/>
+              <a:t> </a:t>
+            </a:r>
+            <a:r>
+              <a:rPr sz="1600" b="0" i="0" u="none" dirty="0" err="1">
+                <a:solidFill>
+                  <a:srgbClr val="0000FF"/>
                 </a:solidFill>
                 <a:latin typeface="Consolas"/>
                 <a:ea typeface="Consolas"/>
                 <a:cs typeface="Consolas"/>
               </a:rPr>
-              <a:t>    </a:t>
-            </a:r>
-            <a:r>
-              <a:rPr sz="1600" b="0" i="0" u="none">
-                <a:solidFill>
-                  <a:srgbClr val="0000FF"/>
+              <a:t>nullptr</a:t>
+            </a:r>
+            <a:r>
+              <a:rPr sz="1600" b="0" i="0" u="none" dirty="0">
+                <a:solidFill>
+                  <a:srgbClr val="000000"/>
                 </a:solidFill>
                 <a:latin typeface="Consolas"/>
                 <a:ea typeface="Consolas"/>
                 <a:cs typeface="Consolas"/>
               </a:rPr>
-              <a:t>if</a:t>
-            </a:r>
-            <a:r>
-              <a:rPr sz="1600" b="0" i="0" u="none">
+              <a:t>;</a:t>
+            </a:r>
+            <a:endParaRPr sz="2600" dirty="0"/>
+          </a:p>
+          <a:p>
+            <a:pPr>
+              <a:defRPr/>
+            </a:pPr>
+            <a:r>
+              <a:rPr sz="1600" b="0" i="0" u="none" dirty="0">
                 <a:solidFill>
                   <a:srgbClr val="000000"/>
                 </a:solidFill>
@@ -40854,38 +41485,38 @@
                 <a:ea typeface="Consolas"/>
                 <a:cs typeface="Consolas"/>
               </a:rPr>
-              <a:t>(*start == value)</a:t>
-            </a:r>
-            <a:endParaRPr sz="2600"/>
-          </a:p>
-          <a:p>
-            <a:pPr>
-              <a:defRPr/>
-            </a:pPr>
-            <a:r>
-              <a:rPr sz="1600" b="0" i="0" u="none">
-                <a:solidFill>
-                  <a:srgbClr val="000000"/>
+              <a:t>    </a:t>
+            </a:r>
+            <a:r>
+              <a:rPr sz="1600" b="0" i="0" u="none" dirty="0">
+                <a:solidFill>
+                  <a:srgbClr val="0000FF"/>
                 </a:solidFill>
                 <a:latin typeface="Consolas"/>
                 <a:ea typeface="Consolas"/>
                 <a:cs typeface="Consolas"/>
               </a:rPr>
-              <a:t>        </a:t>
-            </a:r>
-            <a:r>
-              <a:rPr sz="1600" b="0" i="0" u="none">
-                <a:solidFill>
-                  <a:srgbClr val="0000FF"/>
+              <a:t>if</a:t>
+            </a:r>
+            <a:r>
+              <a:rPr sz="1600" b="0" i="0" u="none" dirty="0">
+                <a:solidFill>
+                  <a:srgbClr val="000000"/>
                 </a:solidFill>
                 <a:latin typeface="Consolas"/>
                 <a:ea typeface="Consolas"/>
                 <a:cs typeface="Consolas"/>
               </a:rPr>
-              <a:t>return</a:t>
-            </a:r>
-            <a:r>
-              <a:rPr sz="1600" b="0" i="0" u="none">
+              <a:t>(*start == value)</a:t>
+            </a:r>
+            <a:endParaRPr sz="2600" dirty="0"/>
+          </a:p>
+          <a:p>
+            <a:pPr>
+              <a:defRPr/>
+            </a:pPr>
+            <a:r>
+              <a:rPr sz="1600" b="0" i="0" u="none" dirty="0">
                 <a:solidFill>
                   <a:srgbClr val="000000"/>
                 </a:solidFill>
@@ -40893,38 +41524,38 @@
                 <a:ea typeface="Consolas"/>
                 <a:cs typeface="Consolas"/>
               </a:rPr>
-              <a:t> start;</a:t>
-            </a:r>
-            <a:endParaRPr sz="2600"/>
-          </a:p>
-          <a:p>
-            <a:pPr>
-              <a:defRPr/>
-            </a:pPr>
-            <a:r>
-              <a:rPr sz="1600" b="0" i="0" u="none">
-                <a:solidFill>
-                  <a:srgbClr val="000000"/>
+              <a:t>        </a:t>
+            </a:r>
+            <a:r>
+              <a:rPr sz="1600" b="0" i="0" u="none" dirty="0">
+                <a:solidFill>
+                  <a:srgbClr val="0000FF"/>
                 </a:solidFill>
                 <a:latin typeface="Consolas"/>
                 <a:ea typeface="Consolas"/>
                 <a:cs typeface="Consolas"/>
               </a:rPr>
-              <a:t>    </a:t>
-            </a:r>
-            <a:r>
-              <a:rPr sz="1600" b="0" i="0" u="none">
-                <a:solidFill>
-                  <a:srgbClr val="0000FF"/>
+              <a:t>return</a:t>
+            </a:r>
+            <a:r>
+              <a:rPr sz="1600" b="0" i="0" u="none" dirty="0">
+                <a:solidFill>
+                  <a:srgbClr val="000000"/>
                 </a:solidFill>
                 <a:latin typeface="Consolas"/>
                 <a:ea typeface="Consolas"/>
                 <a:cs typeface="Consolas"/>
               </a:rPr>
-              <a:t>return</a:t>
-            </a:r>
-            <a:r>
-              <a:rPr sz="1600" b="0" i="0" u="none">
+              <a:t> start;</a:t>
+            </a:r>
+            <a:endParaRPr sz="2600" dirty="0"/>
+          </a:p>
+          <a:p>
+            <a:pPr>
+              <a:defRPr/>
+            </a:pPr>
+            <a:r>
+              <a:rPr sz="1600" b="0" i="0" u="none" dirty="0">
                 <a:solidFill>
                   <a:srgbClr val="000000"/>
                 </a:solidFill>
@@ -40932,26 +41563,81 @@
                 <a:ea typeface="Consolas"/>
                 <a:cs typeface="Consolas"/>
               </a:rPr>
-              <a:t> search(++start, end, value);</a:t>
-            </a:r>
-            <a:endParaRPr sz="2600"/>
-          </a:p>
-          <a:p>
-            <a:pPr>
-              <a:defRPr/>
-            </a:pPr>
-            <a:r>
-              <a:rPr sz="1600" b="0" i="0" u="none">
-                <a:solidFill>
-                  <a:srgbClr val="000000"/>
+              <a:t>    </a:t>
+            </a:r>
+            <a:r>
+              <a:rPr sz="1600" b="0" i="0" u="none" dirty="0">
+                <a:solidFill>
+                  <a:srgbClr val="0000FF"/>
                 </a:solidFill>
                 <a:latin typeface="Consolas"/>
                 <a:ea typeface="Consolas"/>
                 <a:cs typeface="Consolas"/>
               </a:rPr>
+              <a:t>return</a:t>
+            </a:r>
+            <a:r>
+              <a:rPr sz="1600" b="0" i="0" u="none" dirty="0">
+                <a:solidFill>
+                  <a:srgbClr val="000000"/>
+                </a:solidFill>
+                <a:latin typeface="Consolas"/>
+                <a:ea typeface="Consolas"/>
+                <a:cs typeface="Consolas"/>
+              </a:rPr>
+              <a:t> </a:t>
+            </a:r>
+            <a:r>
+              <a:rPr sz="1600" b="0" i="0" u="none" dirty="0" err="1">
+                <a:solidFill>
+                  <a:srgbClr val="000000"/>
+                </a:solidFill>
+                <a:latin typeface="Consolas"/>
+                <a:ea typeface="Consolas"/>
+                <a:cs typeface="Consolas"/>
+              </a:rPr>
+              <a:t>search</a:t>
+            </a:r>
+            <a:r>
+              <a:rPr lang="en-US" sz="1600" b="0" i="0" u="none" dirty="0" err="1">
+                <a:solidFill>
+                  <a:srgbClr val="000000"/>
+                </a:solidFill>
+                <a:latin typeface="Consolas"/>
+                <a:ea typeface="Consolas"/>
+                <a:cs typeface="Consolas"/>
+              </a:rPr>
+              <a:t>_rec</a:t>
+            </a:r>
+            <a:r>
+              <a:rPr sz="1600" b="0" i="0" u="none" dirty="0">
+                <a:solidFill>
+                  <a:srgbClr val="000000"/>
+                </a:solidFill>
+                <a:latin typeface="Consolas"/>
+                <a:ea typeface="Consolas"/>
+                <a:cs typeface="Consolas"/>
+              </a:rPr>
+              <a:t>(++start, end, value);</a:t>
+            </a:r>
+            <a:endParaRPr sz="2600" dirty="0"/>
+          </a:p>
+          <a:p>
+            <a:pPr>
+              <a:defRPr/>
+            </a:pPr>
+            <a:r>
+              <a:rPr sz="1600" b="0" i="0" u="none" dirty="0">
+                <a:solidFill>
+                  <a:srgbClr val="000000"/>
+                </a:solidFill>
+                <a:latin typeface="Consolas"/>
+                <a:ea typeface="Consolas"/>
+                <a:cs typeface="Consolas"/>
+              </a:rPr>
               <a:t>}</a:t>
             </a:r>
-            <a:endParaRPr sz="11000"/>
+            <a:endParaRPr sz="11000" dirty="0"/>
           </a:p>
         </p:txBody>
       </p:sp>
@@ -40964,7 +41650,7 @@
         <p:spPr bwMode="auto">
           <a:xfrm>
             <a:off x="889003" y="5909748"/>
-            <a:ext cx="3300104" cy="366119"/>
+            <a:ext cx="3300104" cy="374141"/>
           </a:xfrm>
           <a:prstGeom prst="rect">
             <a:avLst/>
@@ -40981,12 +41667,12 @@
               <a:defRPr/>
             </a:pPr>
             <a:r>
-              <a:rPr u="sng">
+              <a:rPr lang="en-US" u="sng" dirty="0">
                 <a:hlinkClick r:id="rId3"/>
               </a:rPr>
-              <a:t>https://godbolt.org/z/59h3TMfzT</a:t>
-            </a:r>
-            <a:endParaRPr/>
+              <a:t>https://godbolt.org/z/MrG6vrnTc</a:t>
+            </a:r>
+            <a:endParaRPr dirty="0"/>
           </a:p>
         </p:txBody>
       </p:sp>
@@ -41017,7 +41703,7 @@
               <a:defRPr/>
             </a:pPr>
             <a:r>
-              <a:rPr lang="ru-RU" sz="2000"/>
+              <a:rPr lang="ru-RU" sz="2000" dirty="0"/>
               <a:t>Отдельным случаем оптимизации хвостовых вызовов является хвостовая рекурсия.</a:t>
             </a:r>
           </a:p>
@@ -41027,7 +41713,7 @@
               <a:defRPr/>
             </a:pPr>
             <a:r>
-              <a:rPr lang="ru-RU" sz="2000"/>
+              <a:rPr lang="ru-RU" sz="2000" dirty="0"/>
               <a:t>Если функция оканчивается рекурсивным вызовом, и при этом возвращаемый результат не модифицируется, то цепочка рекурсивных вызовов может быть оптимизирована компилятором в цикл.</a:t>
             </a:r>
           </a:p>
@@ -41037,7 +41723,7 @@
               <a:defRPr/>
             </a:pPr>
             <a:r>
-              <a:rPr lang="ru-RU" sz="2000"/>
+              <a:rPr lang="ru-RU" sz="2000" dirty="0"/>
               <a:t>При этом, в отличие от полноценной рекурсии, на стеке не создается новый кадр стека, а используется текущий.</a:t>
             </a:r>
           </a:p>
@@ -41046,7 +41732,7 @@
               <a:buNone/>
               <a:defRPr/>
             </a:pPr>
-            <a:endParaRPr/>
+            <a:endParaRPr dirty="0"/>
           </a:p>
         </p:txBody>
       </p:sp>
